--- a/Gesture-Controlled-Car-Presentation.pptx
+++ b/Gesture-Controlled-Car-Presentation.pptx
@@ -3107,7 +3107,7 @@
         </p:nvSpPr>
         <p:spPr>
           <a:xfrm>
-            <a:off x="731520" y="457200"/>
+            <a:off x="731520" y="365760"/>
             <a:ext cx="10728655" cy="731520"/>
           </a:xfrm>
           <a:prstGeom prst="rect">
@@ -3116,17 +3116,17 @@
           <a:noFill/>
         </p:spPr>
         <p:txBody>
-          <a:bodyPr wrap="square">
+          <a:bodyPr wrap="square" lIns="0" tIns="0" rIns="0" bIns="0">
             <a:spAutoFit/>
           </a:bodyPr>
           <a:lstStyle/>
           <a:p>
             <a:pPr>
-              <a:defRPr sz="3600" b="1">
+              <a:defRPr sz="3200" b="1">
                 <a:solidFill>
                   <a:srgbClr val="000000"/>
                 </a:solidFill>
-                <a:latin typeface="Arial"/>
+                <a:latin typeface="Calibri"/>
               </a:defRPr>
             </a:pPr>
             <a:r>
@@ -3137,14 +3137,104 @@
       </p:sp>
       <p:sp>
         <p:nvSpPr>
-          <p:cNvPr id="3" name="TextBox 2"/>
+          <p:cNvPr id="3" name="Rectangle 2"/>
+          <p:cNvSpPr/>
+          <p:nvPr/>
+        </p:nvSpPr>
+        <p:spPr>
+          <a:xfrm>
+            <a:off x="731520" y="1097280"/>
+            <a:ext cx="10728655" cy="13716"/>
+          </a:xfrm>
+          <a:prstGeom prst="rect">
+            <a:avLst/>
+          </a:prstGeom>
+          <a:solidFill>
+            <a:srgbClr val="000000"/>
+          </a:solidFill>
+          <a:ln>
+            <a:solidFill>
+              <a:srgbClr val="000000"/>
+            </a:solidFill>
+          </a:ln>
+        </p:spPr>
+        <p:style>
+          <a:lnRef idx="1">
+            <a:schemeClr val="accent1"/>
+          </a:lnRef>
+          <a:fillRef idx="3">
+            <a:schemeClr val="accent1"/>
+          </a:fillRef>
+          <a:effectRef idx="2">
+            <a:schemeClr val="accent1"/>
+          </a:effectRef>
+          <a:fontRef idx="minor">
+            <a:schemeClr val="lt1"/>
+          </a:fontRef>
+        </p:style>
+        <p:txBody>
+          <a:bodyPr rtlCol="0" anchor="ctr"/>
+          <a:lstStyle/>
+          <a:p>
+            <a:pPr algn="ctr"/>
+          </a:p>
+        </p:txBody>
+      </p:sp>
+      <p:sp>
+        <p:nvSpPr>
+          <p:cNvPr id="4" name="Rectangle 3"/>
+          <p:cNvSpPr/>
+          <p:nvPr/>
+        </p:nvSpPr>
+        <p:spPr>
+          <a:xfrm>
+            <a:off x="731520" y="6126480"/>
+            <a:ext cx="10728655" cy="9144"/>
+          </a:xfrm>
+          <a:prstGeom prst="rect">
+            <a:avLst/>
+          </a:prstGeom>
+          <a:solidFill>
+            <a:srgbClr val="DCDCDC"/>
+          </a:solidFill>
+          <a:ln>
+            <a:solidFill>
+              <a:srgbClr val="DCDCDC"/>
+            </a:solidFill>
+          </a:ln>
+        </p:spPr>
+        <p:style>
+          <a:lnRef idx="1">
+            <a:schemeClr val="accent1"/>
+          </a:lnRef>
+          <a:fillRef idx="3">
+            <a:schemeClr val="accent1"/>
+          </a:fillRef>
+          <a:effectRef idx="2">
+            <a:schemeClr val="accent1"/>
+          </a:effectRef>
+          <a:fontRef idx="minor">
+            <a:schemeClr val="lt1"/>
+          </a:fontRef>
+        </p:style>
+        <p:txBody>
+          <a:bodyPr rtlCol="0" anchor="ctr"/>
+          <a:lstStyle/>
+          <a:p>
+            <a:pPr algn="ctr"/>
+          </a:p>
+        </p:txBody>
+      </p:sp>
+      <p:sp>
+        <p:nvSpPr>
+          <p:cNvPr id="5" name="TextBox 4"/>
           <p:cNvSpPr txBox="1"/>
           <p:nvPr/>
         </p:nvSpPr>
         <p:spPr>
           <a:xfrm>
-            <a:off x="731520" y="1645920"/>
-            <a:ext cx="5029200" cy="4572000"/>
+            <a:off x="731520" y="6217920"/>
+            <a:ext cx="8229600" cy="365760"/>
           </a:xfrm>
           <a:prstGeom prst="rect">
             <a:avLst/>
@@ -3152,102 +3242,35 @@
           <a:noFill/>
         </p:spPr>
         <p:txBody>
-          <a:bodyPr wrap="square">
+          <a:bodyPr wrap="square" lIns="0" tIns="0" rIns="0" bIns="0">
             <a:spAutoFit/>
           </a:bodyPr>
           <a:lstStyle/>
           <a:p>
             <a:pPr>
-              <a:spcAft>
-                <a:spcPts val="2000"/>
-              </a:spcAft>
-              <a:defRPr sz="1800" b="1">
-                <a:solidFill>
-                  <a:srgbClr val="000000"/>
-                </a:solidFill>
-                <a:latin typeface="Arial"/>
-              </a:defRPr>
-            </a:pPr>
-            <a:r>
-              <a:t>1. Introduction &amp; Project Overview</a:t>
-            </a:r>
-          </a:p>
-          <a:p>
-            <a:pPr>
-              <a:spcAft>
-                <a:spcPts val="2000"/>
-              </a:spcAft>
-              <a:defRPr sz="1800" b="1">
-                <a:solidFill>
-                  <a:srgbClr val="000000"/>
-                </a:solidFill>
-                <a:latin typeface="Arial"/>
-              </a:defRPr>
-            </a:pPr>
-            <a:r>
-              <a:t>2. System Architecture Design</a:t>
-            </a:r>
-          </a:p>
-          <a:p>
-            <a:pPr>
-              <a:spcAft>
-                <a:spcPts val="2000"/>
-              </a:spcAft>
-              <a:defRPr sz="1800" b="1">
-                <a:solidFill>
-                  <a:srgbClr val="000000"/>
-                </a:solidFill>
-                <a:latin typeface="Arial"/>
-              </a:defRPr>
-            </a:pPr>
-            <a:r>
-              <a:t>3. Transmitter Hardware Components</a:t>
-            </a:r>
-          </a:p>
-          <a:p>
-            <a:pPr>
-              <a:spcAft>
-                <a:spcPts val="2000"/>
-              </a:spcAft>
-              <a:defRPr sz="1800" b="1">
-                <a:solidFill>
-                  <a:srgbClr val="000000"/>
-                </a:solidFill>
-                <a:latin typeface="Arial"/>
-              </a:defRPr>
-            </a:pPr>
-            <a:r>
-              <a:t>4. Receiver Hardware Components</a:t>
-            </a:r>
-          </a:p>
-          <a:p>
-            <a:pPr>
-              <a:spcAft>
-                <a:spcPts val="2000"/>
-              </a:spcAft>
-              <a:defRPr sz="1800" b="1">
-                <a:solidFill>
-                  <a:srgbClr val="000000"/>
-                </a:solidFill>
-                <a:latin typeface="Arial"/>
-              </a:defRPr>
-            </a:pPr>
-            <a:r>
-              <a:t>5. Circuit Integration &amp; Wiring</a:t>
-            </a:r>
-          </a:p>
-        </p:txBody>
-      </p:sp>
-      <p:sp>
-        <p:nvSpPr>
-          <p:cNvPr id="4" name="TextBox 3"/>
+              <a:defRPr sz="900">
+                <a:solidFill>
+                  <a:srgbClr val="787878"/>
+                </a:solidFill>
+                <a:latin typeface="Calibri"/>
+              </a:defRPr>
+            </a:pPr>
+            <a:r>
+              <a:t>GESTURE CONTROLLED WIRELESS 4WD ROBOTIC CAR  |  MINI-PROJECT REPORT</a:t>
+            </a:r>
+          </a:p>
+        </p:txBody>
+      </p:sp>
+      <p:sp>
+        <p:nvSpPr>
+          <p:cNvPr id="6" name="TextBox 5"/>
           <p:cNvSpPr txBox="1"/>
           <p:nvPr/>
         </p:nvSpPr>
         <p:spPr>
           <a:xfrm>
-            <a:off x="6217920" y="1645920"/>
-            <a:ext cx="5029200" cy="4572000"/>
+            <a:off x="10058400" y="6217920"/>
+            <a:ext cx="1371600" cy="365760"/>
           </a:xfrm>
           <a:prstGeom prst="rect">
             <a:avLst/>
@@ -3255,88 +3278,387 @@
           <a:noFill/>
         </p:spPr>
         <p:txBody>
+          <a:bodyPr wrap="square" lIns="0" tIns="0" rIns="0" bIns="0">
+            <a:spAutoFit/>
+          </a:bodyPr>
+          <a:lstStyle/>
+          <a:p>
+            <a:pPr algn="r">
+              <a:defRPr sz="900" b="1">
+                <a:solidFill>
+                  <a:srgbClr val="787878"/>
+                </a:solidFill>
+                <a:latin typeface="Calibri"/>
+              </a:defRPr>
+            </a:pPr>
+            <a:r>
+              <a:t>Slide 1 of 12</a:t>
+            </a:r>
+          </a:p>
+        </p:txBody>
+      </p:sp>
+      <p:sp>
+        <p:nvSpPr>
+          <p:cNvPr id="7" name="TextBox 6"/>
+          <p:cNvSpPr txBox="1"/>
+          <p:nvPr/>
+        </p:nvSpPr>
+        <p:spPr>
+          <a:xfrm>
+            <a:off x="914400" y="1645920"/>
+            <a:ext cx="4754880" cy="4114800"/>
+          </a:xfrm>
+          <a:prstGeom prst="rect">
+            <a:avLst/>
+          </a:prstGeom>
+          <a:noFill/>
+        </p:spPr>
+        <p:txBody>
           <a:bodyPr wrap="square">
             <a:spAutoFit/>
           </a:bodyPr>
           <a:lstStyle/>
           <a:p>
             <a:pPr>
+              <a:spcBef>
+                <a:spcPts val="1200"/>
+              </a:spcBef>
+              <a:defRPr sz="1500" b="1">
+                <a:solidFill>
+                  <a:srgbClr val="000000"/>
+                </a:solidFill>
+                <a:latin typeface="Calibri"/>
+              </a:defRPr>
+            </a:pPr>
+            <a:r>
+              <a:t>01. INTRODUCTION</a:t>
+            </a:r>
+          </a:p>
+          <a:p>
+            <a:pPr>
               <a:spcAft>
-                <a:spcPts val="2000"/>
+                <a:spcPts val="800"/>
               </a:spcAft>
-              <a:defRPr sz="1800" b="1">
+              <a:defRPr sz="1250">
+                <a:solidFill>
+                  <a:srgbClr val="3C3C3C"/>
+                </a:solidFill>
+                <a:latin typeface="Calibri"/>
+              </a:defRPr>
+            </a:pPr>
+            <a:r>
+              <a:t>Project motivations, HMI background, and previous works review.</a:t>
+            </a:r>
+          </a:p>
+          <a:p>
+            <a:pPr>
+              <a:spcBef>
+                <a:spcPts val="1200"/>
+              </a:spcBef>
+              <a:defRPr sz="1500" b="1">
                 <a:solidFill>
                   <a:srgbClr val="000000"/>
                 </a:solidFill>
-                <a:latin typeface="Arial"/>
-              </a:defRPr>
-            </a:pPr>
-            <a:r>
-              <a:t>6. Wireless Protocol: ESP-NOW</a:t>
+                <a:latin typeface="Calibri"/>
+              </a:defRPr>
+            </a:pPr>
+            <a:r>
+              <a:t>02. SYSTEM DESIGN</a:t>
             </a:r>
           </a:p>
           <a:p>
             <a:pPr>
               <a:spcAft>
-                <a:spcPts val="2000"/>
+                <a:spcPts val="800"/>
               </a:spcAft>
-              <a:defRPr sz="1800" b="1">
+              <a:defRPr sz="1250">
+                <a:solidFill>
+                  <a:srgbClr val="3C3C3C"/>
+                </a:solidFill>
+                <a:latin typeface="Calibri"/>
+              </a:defRPr>
+            </a:pPr>
+            <a:r>
+              <a:t>Overall system block diagram and hardware-software signal flow.</a:t>
+            </a:r>
+          </a:p>
+          <a:p>
+            <a:pPr>
+              <a:spcBef>
+                <a:spcPts val="1200"/>
+              </a:spcBef>
+              <a:defRPr sz="1500" b="1">
                 <a:solidFill>
                   <a:srgbClr val="000000"/>
                 </a:solidFill>
-                <a:latin typeface="Arial"/>
-              </a:defRPr>
-            </a:pPr>
-            <a:r>
-              <a:t>7. Mecanum Wheel Kinematics</a:t>
+                <a:latin typeface="Calibri"/>
+              </a:defRPr>
+            </a:pPr>
+            <a:r>
+              <a:t>03. TRANSMITTER HARDWARE</a:t>
             </a:r>
           </a:p>
           <a:p>
             <a:pPr>
               <a:spcAft>
-                <a:spcPts val="2000"/>
+                <a:spcPts val="800"/>
               </a:spcAft>
-              <a:defRPr sz="1800" b="1">
+              <a:defRPr sz="1250">
+                <a:solidFill>
+                  <a:srgbClr val="3C3C3C"/>
+                </a:solidFill>
+                <a:latin typeface="Calibri"/>
+              </a:defRPr>
+            </a:pPr>
+            <a:r>
+              <a:t>ESP32 transmitter board, wearable glove assembly, and MPU6050 sensor.</a:t>
+            </a:r>
+          </a:p>
+          <a:p>
+            <a:pPr>
+              <a:spcBef>
+                <a:spcPts val="1200"/>
+              </a:spcBef>
+              <a:defRPr sz="1500" b="1">
                 <a:solidFill>
                   <a:srgbClr val="000000"/>
                 </a:solidFill>
-                <a:latin typeface="Arial"/>
-              </a:defRPr>
-            </a:pPr>
-            <a:r>
-              <a:t>8. Software Control Firmware</a:t>
+                <a:latin typeface="Calibri"/>
+              </a:defRPr>
+            </a:pPr>
+            <a:r>
+              <a:t>04. RECEIVER HARDWARE</a:t>
             </a:r>
           </a:p>
           <a:p>
             <a:pPr>
               <a:spcAft>
-                <a:spcPts val="2000"/>
+                <a:spcPts val="800"/>
               </a:spcAft>
-              <a:defRPr sz="1800" b="1">
+              <a:defRPr sz="1250">
+                <a:solidFill>
+                  <a:srgbClr val="3C3C3C"/>
+                </a:solidFill>
+                <a:latin typeface="Calibri"/>
+              </a:defRPr>
+            </a:pPr>
+            <a:r>
+              <a:t>ESP32 receiver board, dual L298N drivers, and four 200 RPM BO motors.</a:t>
+            </a:r>
+          </a:p>
+          <a:p>
+            <a:pPr>
+              <a:spcBef>
+                <a:spcPts val="1200"/>
+              </a:spcBef>
+              <a:defRPr sz="1500" b="1">
                 <a:solidFill>
                   <a:srgbClr val="000000"/>
                 </a:solidFill>
-                <a:latin typeface="Arial"/>
-              </a:defRPr>
-            </a:pPr>
-            <a:r>
-              <a:t>9. Calibration &amp; Physical Assembly</a:t>
+                <a:latin typeface="Calibri"/>
+              </a:defRPr>
+            </a:pPr>
+            <a:r>
+              <a:t>05. CIRCUIT INTEGRATION</a:t>
             </a:r>
           </a:p>
           <a:p>
             <a:pPr>
               <a:spcAft>
-                <a:spcPts val="2000"/>
+                <a:spcPts val="800"/>
               </a:spcAft>
-              <a:defRPr sz="1800" b="1">
+              <a:defRPr sz="1250">
+                <a:solidFill>
+                  <a:srgbClr val="3C3C3C"/>
+                </a:solidFill>
+                <a:latin typeface="Calibri"/>
+              </a:defRPr>
+            </a:pPr>
+            <a:r>
+              <a:t>Direct GPIO schematic connections and common grounding system.</a:t>
+            </a:r>
+          </a:p>
+        </p:txBody>
+      </p:sp>
+      <p:sp>
+        <p:nvSpPr>
+          <p:cNvPr id="8" name="TextBox 7"/>
+          <p:cNvSpPr txBox="1"/>
+          <p:nvPr/>
+        </p:nvSpPr>
+        <p:spPr>
+          <a:xfrm>
+            <a:off x="6217920" y="1645920"/>
+            <a:ext cx="4754880" cy="4114800"/>
+          </a:xfrm>
+          <a:prstGeom prst="rect">
+            <a:avLst/>
+          </a:prstGeom>
+          <a:noFill/>
+        </p:spPr>
+        <p:txBody>
+          <a:bodyPr wrap="square">
+            <a:spAutoFit/>
+          </a:bodyPr>
+          <a:lstStyle/>
+          <a:p>
+            <a:pPr>
+              <a:spcBef>
+                <a:spcPts val="1200"/>
+              </a:spcBef>
+              <a:defRPr sz="1500" b="1">
                 <a:solidFill>
                   <a:srgbClr val="000000"/>
                 </a:solidFill>
-                <a:latin typeface="Arial"/>
-              </a:defRPr>
-            </a:pPr>
-            <a:r>
-              <a:t>10. Performance Testing &amp; Future Scope</a:t>
+                <a:latin typeface="Calibri"/>
+              </a:defRPr>
+            </a:pPr>
+            <a:r>
+              <a:t>06. WIRELESS PROTOCOL</a:t>
+            </a:r>
+          </a:p>
+          <a:p>
+            <a:pPr>
+              <a:spcAft>
+                <a:spcPts val="800"/>
+              </a:spcAft>
+              <a:defRPr sz="1250">
+                <a:solidFill>
+                  <a:srgbClr val="3C3C3C"/>
+                </a:solidFill>
+                <a:latin typeface="Calibri"/>
+              </a:defRPr>
+            </a:pPr>
+            <a:r>
+              <a:t>ESP-NOW protocol, connectionless peer-to-peer latency, and MAC pairing.</a:t>
+            </a:r>
+          </a:p>
+          <a:p>
+            <a:pPr>
+              <a:spcBef>
+                <a:spcPts val="1200"/>
+              </a:spcBef>
+              <a:defRPr sz="1500" b="1">
+                <a:solidFill>
+                  <a:srgbClr val="000000"/>
+                </a:solidFill>
+                <a:latin typeface="Calibri"/>
+              </a:defRPr>
+            </a:pPr>
+            <a:r>
+              <a:t>07. WHEEL KINEMATICS</a:t>
+            </a:r>
+          </a:p>
+          <a:p>
+            <a:pPr>
+              <a:spcAft>
+                <a:spcPts val="800"/>
+              </a:spcAft>
+              <a:defRPr sz="1250">
+                <a:solidFill>
+                  <a:srgbClr val="3C3C3C"/>
+                </a:solidFill>
+                <a:latin typeface="Calibri"/>
+              </a:defRPr>
+            </a:pPr>
+            <a:r>
+              <a:t>Mecanum wheel force vectors and the holonomic movement control matrix.</a:t>
+            </a:r>
+          </a:p>
+          <a:p>
+            <a:pPr>
+              <a:spcBef>
+                <a:spcPts val="1200"/>
+              </a:spcBef>
+              <a:defRPr sz="1500" b="1">
+                <a:solidFill>
+                  <a:srgbClr val="000000"/>
+                </a:solidFill>
+                <a:latin typeface="Calibri"/>
+              </a:defRPr>
+            </a:pPr>
+            <a:r>
+              <a:t>08. CONTROL ALGORITHMS</a:t>
+            </a:r>
+          </a:p>
+          <a:p>
+            <a:pPr>
+              <a:spcAft>
+                <a:spcPts val="800"/>
+              </a:spcAft>
+              <a:defRPr sz="1250">
+                <a:solidFill>
+                  <a:srgbClr val="3C3C3C"/>
+                </a:solidFill>
+                <a:latin typeface="Calibri"/>
+              </a:defRPr>
+            </a:pPr>
+            <a:r>
+              <a:t>Trigonometric Pitch and Roll calculation, filters, and code listings.</a:t>
+            </a:r>
+          </a:p>
+          <a:p>
+            <a:pPr>
+              <a:spcBef>
+                <a:spcPts val="1200"/>
+              </a:spcBef>
+              <a:defRPr sz="1500" b="1">
+                <a:solidFill>
+                  <a:srgbClr val="000000"/>
+                </a:solidFill>
+                <a:latin typeface="Calibri"/>
+              </a:defRPr>
+            </a:pPr>
+            <a:r>
+              <a:t>09. CALIBRATION &amp; ASSEMBLY</a:t>
+            </a:r>
+          </a:p>
+          <a:p>
+            <a:pPr>
+              <a:spcAft>
+                <a:spcPts val="800"/>
+              </a:spcAft>
+              <a:defRPr sz="1250">
+                <a:solidFill>
+                  <a:srgbClr val="3C3C3C"/>
+                </a:solidFill>
+                <a:latin typeface="Calibri"/>
+              </a:defRPr>
+            </a:pPr>
+            <a:r>
+              <a:t>Sensor threshold configuration and wearable glove prototype build.</a:t>
+            </a:r>
+          </a:p>
+          <a:p>
+            <a:pPr>
+              <a:spcBef>
+                <a:spcPts val="1200"/>
+              </a:spcBef>
+              <a:defRPr sz="1500" b="1">
+                <a:solidFill>
+                  <a:srgbClr val="000000"/>
+                </a:solidFill>
+                <a:latin typeface="Calibri"/>
+              </a:defRPr>
+            </a:pPr>
+            <a:r>
+              <a:t>10. TESTING &amp; FUTURE SCOPE</a:t>
+            </a:r>
+          </a:p>
+          <a:p>
+            <a:pPr>
+              <a:spcAft>
+                <a:spcPts val="800"/>
+              </a:spcAft>
+              <a:defRPr sz="1250">
+                <a:solidFill>
+                  <a:srgbClr val="3C3C3C"/>
+                </a:solidFill>
+                <a:latin typeface="Calibri"/>
+              </a:defRPr>
+            </a:pPr>
+            <a:r>
+              <a:t>Performance metrics (8 ms latency, 45 m range) and next steps.</a:t>
             </a:r>
           </a:p>
         </p:txBody>
@@ -3367,7 +3689,7 @@
         </p:nvSpPr>
         <p:spPr>
           <a:xfrm>
-            <a:off x="731520" y="457200"/>
+            <a:off x="731520" y="365760"/>
             <a:ext cx="10728655" cy="731520"/>
           </a:xfrm>
           <a:prstGeom prst="rect">
@@ -3376,17 +3698,17 @@
           <a:noFill/>
         </p:spPr>
         <p:txBody>
-          <a:bodyPr wrap="square">
+          <a:bodyPr wrap="square" lIns="0" tIns="0" rIns="0" bIns="0">
             <a:spAutoFit/>
           </a:bodyPr>
           <a:lstStyle/>
           <a:p>
             <a:pPr>
-              <a:defRPr sz="3600" b="1">
+              <a:defRPr sz="3200" b="1">
                 <a:solidFill>
                   <a:srgbClr val="000000"/>
                 </a:solidFill>
-                <a:latin typeface="Arial"/>
+                <a:latin typeface="Calibri"/>
               </a:defRPr>
             </a:pPr>
             <a:r>
@@ -3397,14 +3719,104 @@
       </p:sp>
       <p:sp>
         <p:nvSpPr>
-          <p:cNvPr id="3" name="TextBox 2"/>
+          <p:cNvPr id="3" name="Rectangle 2"/>
+          <p:cNvSpPr/>
+          <p:nvPr/>
+        </p:nvSpPr>
+        <p:spPr>
+          <a:xfrm>
+            <a:off x="731520" y="1097280"/>
+            <a:ext cx="10728655" cy="13716"/>
+          </a:xfrm>
+          <a:prstGeom prst="rect">
+            <a:avLst/>
+          </a:prstGeom>
+          <a:solidFill>
+            <a:srgbClr val="000000"/>
+          </a:solidFill>
+          <a:ln>
+            <a:solidFill>
+              <a:srgbClr val="000000"/>
+            </a:solidFill>
+          </a:ln>
+        </p:spPr>
+        <p:style>
+          <a:lnRef idx="1">
+            <a:schemeClr val="accent1"/>
+          </a:lnRef>
+          <a:fillRef idx="3">
+            <a:schemeClr val="accent1"/>
+          </a:fillRef>
+          <a:effectRef idx="2">
+            <a:schemeClr val="accent1"/>
+          </a:effectRef>
+          <a:fontRef idx="minor">
+            <a:schemeClr val="lt1"/>
+          </a:fontRef>
+        </p:style>
+        <p:txBody>
+          <a:bodyPr rtlCol="0" anchor="ctr"/>
+          <a:lstStyle/>
+          <a:p>
+            <a:pPr algn="ctr"/>
+          </a:p>
+        </p:txBody>
+      </p:sp>
+      <p:sp>
+        <p:nvSpPr>
+          <p:cNvPr id="4" name="Rectangle 3"/>
+          <p:cNvSpPr/>
+          <p:nvPr/>
+        </p:nvSpPr>
+        <p:spPr>
+          <a:xfrm>
+            <a:off x="731520" y="6126480"/>
+            <a:ext cx="10728655" cy="9144"/>
+          </a:xfrm>
+          <a:prstGeom prst="rect">
+            <a:avLst/>
+          </a:prstGeom>
+          <a:solidFill>
+            <a:srgbClr val="DCDCDC"/>
+          </a:solidFill>
+          <a:ln>
+            <a:solidFill>
+              <a:srgbClr val="DCDCDC"/>
+            </a:solidFill>
+          </a:ln>
+        </p:spPr>
+        <p:style>
+          <a:lnRef idx="1">
+            <a:schemeClr val="accent1"/>
+          </a:lnRef>
+          <a:fillRef idx="3">
+            <a:schemeClr val="accent1"/>
+          </a:fillRef>
+          <a:effectRef idx="2">
+            <a:schemeClr val="accent1"/>
+          </a:effectRef>
+          <a:fontRef idx="minor">
+            <a:schemeClr val="lt1"/>
+          </a:fontRef>
+        </p:style>
+        <p:txBody>
+          <a:bodyPr rtlCol="0" anchor="ctr"/>
+          <a:lstStyle/>
+          <a:p>
+            <a:pPr algn="ctr"/>
+          </a:p>
+        </p:txBody>
+      </p:sp>
+      <p:sp>
+        <p:nvSpPr>
+          <p:cNvPr id="5" name="TextBox 4"/>
           <p:cNvSpPr txBox="1"/>
           <p:nvPr/>
         </p:nvSpPr>
         <p:spPr>
           <a:xfrm>
-            <a:off x="731520" y="1645920"/>
-            <a:ext cx="5029200" cy="4572000"/>
+            <a:off x="731520" y="6217920"/>
+            <a:ext cx="8229600" cy="365760"/>
           </a:xfrm>
           <a:prstGeom prst="rect">
             <a:avLst/>
@@ -3412,6 +3824,78 @@
           <a:noFill/>
         </p:spPr>
         <p:txBody>
+          <a:bodyPr wrap="square" lIns="0" tIns="0" rIns="0" bIns="0">
+            <a:spAutoFit/>
+          </a:bodyPr>
+          <a:lstStyle/>
+          <a:p>
+            <a:pPr>
+              <a:defRPr sz="900">
+                <a:solidFill>
+                  <a:srgbClr val="787878"/>
+                </a:solidFill>
+                <a:latin typeface="Calibri"/>
+              </a:defRPr>
+            </a:pPr>
+            <a:r>
+              <a:t>GESTURE CONTROLLED WIRELESS 4WD ROBOTIC CAR  |  MINI-PROJECT REPORT</a:t>
+            </a:r>
+          </a:p>
+        </p:txBody>
+      </p:sp>
+      <p:sp>
+        <p:nvSpPr>
+          <p:cNvPr id="6" name="TextBox 5"/>
+          <p:cNvSpPr txBox="1"/>
+          <p:nvPr/>
+        </p:nvSpPr>
+        <p:spPr>
+          <a:xfrm>
+            <a:off x="10058400" y="6217920"/>
+            <a:ext cx="1371600" cy="365760"/>
+          </a:xfrm>
+          <a:prstGeom prst="rect">
+            <a:avLst/>
+          </a:prstGeom>
+          <a:noFill/>
+        </p:spPr>
+        <p:txBody>
+          <a:bodyPr wrap="square" lIns="0" tIns="0" rIns="0" bIns="0">
+            <a:spAutoFit/>
+          </a:bodyPr>
+          <a:lstStyle/>
+          <a:p>
+            <a:pPr algn="r">
+              <a:defRPr sz="900" b="1">
+                <a:solidFill>
+                  <a:srgbClr val="787878"/>
+                </a:solidFill>
+                <a:latin typeface="Calibri"/>
+              </a:defRPr>
+            </a:pPr>
+            <a:r>
+              <a:t>Slide 10 of 12</a:t>
+            </a:r>
+          </a:p>
+        </p:txBody>
+      </p:sp>
+      <p:sp>
+        <p:nvSpPr>
+          <p:cNvPr id="7" name="TextBox 6"/>
+          <p:cNvSpPr txBox="1"/>
+          <p:nvPr/>
+        </p:nvSpPr>
+        <p:spPr>
+          <a:xfrm>
+            <a:off x="914400" y="1645920"/>
+            <a:ext cx="4754880" cy="4114800"/>
+          </a:xfrm>
+          <a:prstGeom prst="rect">
+            <a:avLst/>
+          </a:prstGeom>
+          <a:noFill/>
+        </p:spPr>
+        <p:txBody>
           <a:bodyPr wrap="square">
             <a:spAutoFit/>
           </a:bodyPr>
@@ -3421,15 +3905,15 @@
               <a:spcBef>
                 <a:spcPts val="1200"/>
               </a:spcBef>
-              <a:defRPr sz="1600" b="1">
+              <a:defRPr sz="1500" b="1">
                 <a:solidFill>
                   <a:srgbClr val="000000"/>
                 </a:solidFill>
-                <a:latin typeface="Arial"/>
-              </a:defRPr>
-            </a:pPr>
-            <a:r>
-              <a:t>• Threshold Calibration:</a:t>
+                <a:latin typeface="Calibri"/>
+              </a:defRPr>
+            </a:pPr>
+            <a:r>
+              <a:t>Sensor Threshold Calibration</a:t>
             </a:r>
           </a:p>
           <a:p>
@@ -3437,15 +3921,15 @@
               <a:spcAft>
                 <a:spcPts val="800"/>
               </a:spcAft>
-              <a:defRPr sz="1600">
-                <a:solidFill>
-                  <a:srgbClr val="505050"/>
-                </a:solidFill>
-                <a:latin typeface="Arial"/>
-              </a:defRPr>
-            </a:pPr>
-            <a:r>
-              <a:t>  Neutral flat state mapped around values 310-350. Tilted states calibrated around thresholds (&lt; 290 and &gt; 370).</a:t>
+              <a:defRPr sz="1250">
+                <a:solidFill>
+                  <a:srgbClr val="3C3C3C"/>
+                </a:solidFill>
+                <a:latin typeface="Calibri"/>
+              </a:defRPr>
+            </a:pPr>
+            <a:r>
+              <a:t>Neutral flat state mapped to 310-350. Directional tilt triggers are set at boundaries (&lt; 290 and &gt; 370) to prevent accidental movements.</a:t>
             </a:r>
           </a:p>
           <a:p>
@@ -3453,15 +3937,15 @@
               <a:spcBef>
                 <a:spcPts val="1200"/>
               </a:spcBef>
-              <a:defRPr sz="1600" b="1">
+              <a:defRPr sz="1500" b="1">
                 <a:solidFill>
                   <a:srgbClr val="000000"/>
                 </a:solidFill>
-                <a:latin typeface="Arial"/>
-              </a:defRPr>
-            </a:pPr>
-            <a:r>
-              <a:t>• Wearable Gesture Glove Setup:</a:t>
+                <a:latin typeface="Calibri"/>
+              </a:defRPr>
+            </a:pPr>
+            <a:r>
+              <a:t>Wearable Control Glove</a:t>
             </a:r>
           </a:p>
           <a:p>
@@ -3469,15 +3953,15 @@
               <a:spcAft>
                 <a:spcPts val="800"/>
               </a:spcAft>
-              <a:defRPr sz="1600">
-                <a:solidFill>
-                  <a:srgbClr val="505050"/>
-                </a:solidFill>
-                <a:latin typeface="Arial"/>
-              </a:defRPr>
-            </a:pPr>
-            <a:r>
-              <a:t>  MPU6050 and ESP32 transmitter secured to a wearable glove to match natural hand movements.</a:t>
+              <a:defRPr sz="1250">
+                <a:solidFill>
+                  <a:srgbClr val="3C3C3C"/>
+                </a:solidFill>
+                <a:latin typeface="Calibri"/>
+              </a:defRPr>
+            </a:pPr>
+            <a:r>
+              <a:t>MPU6050 sensor, ESP32 transmitter, and a slide power switch integrated onto a wearable glove for comfortable, intuitive hand gestures.</a:t>
             </a:r>
           </a:p>
           <a:p>
@@ -3485,15 +3969,15 @@
               <a:spcBef>
                 <a:spcPts val="1200"/>
               </a:spcBef>
-              <a:defRPr sz="1600" b="1">
+              <a:defRPr sz="1500" b="1">
                 <a:solidFill>
                   <a:srgbClr val="000000"/>
                 </a:solidFill>
-                <a:latin typeface="Arial"/>
-              </a:defRPr>
-            </a:pPr>
-            <a:r>
-              <a:t>• Assembled 4WD Vehicle:</a:t>
+                <a:latin typeface="Calibri"/>
+              </a:defRPr>
+            </a:pPr>
+            <a:r>
+              <a:t>Assembled 4WD Vehicle</a:t>
             </a:r>
           </a:p>
           <a:p>
@@ -3501,22 +3985,22 @@
               <a:spcAft>
                 <a:spcPts val="800"/>
               </a:spcAft>
-              <a:defRPr sz="1600">
-                <a:solidFill>
-                  <a:srgbClr val="505050"/>
-                </a:solidFill>
-                <a:latin typeface="Arial"/>
-              </a:defRPr>
-            </a:pPr>
-            <a:r>
-              <a:t>  Geared BO motors, L298N drivers, battery pack, and ESP32 receiver consolidated onto a stable 4WD mobile platform.</a:t>
+              <a:defRPr sz="1250">
+                <a:solidFill>
+                  <a:srgbClr val="3C3C3C"/>
+                </a:solidFill>
+                <a:latin typeface="Calibri"/>
+              </a:defRPr>
+            </a:pPr>
+            <a:r>
+              <a:t>Dual shaft BO motors, L298N drivers, 18650 battery pack, and ESP32 receiver consolidated onto a stable dual-deck acrylic robot chassis.</a:t>
             </a:r>
           </a:p>
         </p:txBody>
       </p:sp>
       <p:pic>
         <p:nvPicPr>
-          <p:cNvPr id="4" name="Picture 3" descr="img1.jpeg"/>
+          <p:cNvPr id="8" name="Picture 7" descr="img1.jpeg"/>
           <p:cNvPicPr>
             <a:picLocks noChangeAspect="1"/>
           </p:cNvPicPr>
@@ -3531,16 +4015,21 @@
         <p:spPr>
           <a:xfrm>
             <a:off x="6217920" y="1645920"/>
-            <a:ext cx="2468880" cy="4114800"/>
+            <a:ext cx="2468880" cy="4023360"/>
           </a:xfrm>
           <a:prstGeom prst="rect">
             <a:avLst/>
           </a:prstGeom>
+          <a:ln w="12700">
+            <a:solidFill>
+              <a:srgbClr val="DCDCDC"/>
+            </a:solidFill>
+          </a:ln>
         </p:spPr>
       </p:pic>
       <p:pic>
         <p:nvPicPr>
-          <p:cNvPr id="5" name="Picture 4" descr="img2.jpeg"/>
+          <p:cNvPr id="9" name="Picture 8" descr="img2.jpeg"/>
           <p:cNvPicPr>
             <a:picLocks noChangeAspect="1"/>
           </p:cNvPicPr>
@@ -3554,12 +4043,17 @@
         </p:blipFill>
         <p:spPr>
           <a:xfrm>
-            <a:off x="8961120" y="1645920"/>
-            <a:ext cx="2468880" cy="4114800"/>
+            <a:off x="8778240" y="1645920"/>
+            <a:ext cx="2468880" cy="4023360"/>
           </a:xfrm>
           <a:prstGeom prst="rect">
             <a:avLst/>
           </a:prstGeom>
+          <a:ln w="12700">
+            <a:solidFill>
+              <a:srgbClr val="DCDCDC"/>
+            </a:solidFill>
+          </a:ln>
         </p:spPr>
       </p:pic>
     </p:spTree>
@@ -3588,7 +4082,7 @@
         </p:nvSpPr>
         <p:spPr>
           <a:xfrm>
-            <a:off x="731520" y="457200"/>
+            <a:off x="731520" y="365760"/>
             <a:ext cx="10728655" cy="731520"/>
           </a:xfrm>
           <a:prstGeom prst="rect">
@@ -3597,17 +4091,17 @@
           <a:noFill/>
         </p:spPr>
         <p:txBody>
-          <a:bodyPr wrap="square">
+          <a:bodyPr wrap="square" lIns="0" tIns="0" rIns="0" bIns="0">
             <a:spAutoFit/>
           </a:bodyPr>
           <a:lstStyle/>
           <a:p>
             <a:pPr>
-              <a:defRPr sz="3600" b="1">
+              <a:defRPr sz="3200" b="1">
                 <a:solidFill>
                   <a:srgbClr val="000000"/>
                 </a:solidFill>
-                <a:latin typeface="Arial"/>
+                <a:latin typeface="Calibri"/>
               </a:defRPr>
             </a:pPr>
             <a:r>
@@ -3618,14 +4112,104 @@
       </p:sp>
       <p:sp>
         <p:nvSpPr>
-          <p:cNvPr id="3" name="TextBox 2"/>
+          <p:cNvPr id="3" name="Rectangle 2"/>
+          <p:cNvSpPr/>
+          <p:nvPr/>
+        </p:nvSpPr>
+        <p:spPr>
+          <a:xfrm>
+            <a:off x="731520" y="1097280"/>
+            <a:ext cx="10728655" cy="13716"/>
+          </a:xfrm>
+          <a:prstGeom prst="rect">
+            <a:avLst/>
+          </a:prstGeom>
+          <a:solidFill>
+            <a:srgbClr val="000000"/>
+          </a:solidFill>
+          <a:ln>
+            <a:solidFill>
+              <a:srgbClr val="000000"/>
+            </a:solidFill>
+          </a:ln>
+        </p:spPr>
+        <p:style>
+          <a:lnRef idx="1">
+            <a:schemeClr val="accent1"/>
+          </a:lnRef>
+          <a:fillRef idx="3">
+            <a:schemeClr val="accent1"/>
+          </a:fillRef>
+          <a:effectRef idx="2">
+            <a:schemeClr val="accent1"/>
+          </a:effectRef>
+          <a:fontRef idx="minor">
+            <a:schemeClr val="lt1"/>
+          </a:fontRef>
+        </p:style>
+        <p:txBody>
+          <a:bodyPr rtlCol="0" anchor="ctr"/>
+          <a:lstStyle/>
+          <a:p>
+            <a:pPr algn="ctr"/>
+          </a:p>
+        </p:txBody>
+      </p:sp>
+      <p:sp>
+        <p:nvSpPr>
+          <p:cNvPr id="4" name="Rectangle 3"/>
+          <p:cNvSpPr/>
+          <p:nvPr/>
+        </p:nvSpPr>
+        <p:spPr>
+          <a:xfrm>
+            <a:off x="731520" y="6126480"/>
+            <a:ext cx="10728655" cy="9144"/>
+          </a:xfrm>
+          <a:prstGeom prst="rect">
+            <a:avLst/>
+          </a:prstGeom>
+          <a:solidFill>
+            <a:srgbClr val="DCDCDC"/>
+          </a:solidFill>
+          <a:ln>
+            <a:solidFill>
+              <a:srgbClr val="DCDCDC"/>
+            </a:solidFill>
+          </a:ln>
+        </p:spPr>
+        <p:style>
+          <a:lnRef idx="1">
+            <a:schemeClr val="accent1"/>
+          </a:lnRef>
+          <a:fillRef idx="3">
+            <a:schemeClr val="accent1"/>
+          </a:fillRef>
+          <a:effectRef idx="2">
+            <a:schemeClr val="accent1"/>
+          </a:effectRef>
+          <a:fontRef idx="minor">
+            <a:schemeClr val="lt1"/>
+          </a:fontRef>
+        </p:style>
+        <p:txBody>
+          <a:bodyPr rtlCol="0" anchor="ctr"/>
+          <a:lstStyle/>
+          <a:p>
+            <a:pPr algn="ctr"/>
+          </a:p>
+        </p:txBody>
+      </p:sp>
+      <p:sp>
+        <p:nvSpPr>
+          <p:cNvPr id="5" name="TextBox 4"/>
           <p:cNvSpPr txBox="1"/>
           <p:nvPr/>
         </p:nvSpPr>
         <p:spPr>
           <a:xfrm>
-            <a:off x="731520" y="1645920"/>
-            <a:ext cx="4114800" cy="4572000"/>
+            <a:off x="731520" y="6217920"/>
+            <a:ext cx="8229600" cy="365760"/>
           </a:xfrm>
           <a:prstGeom prst="rect">
             <a:avLst/>
@@ -3633,6 +4217,78 @@
           <a:noFill/>
         </p:spPr>
         <p:txBody>
+          <a:bodyPr wrap="square" lIns="0" tIns="0" rIns="0" bIns="0">
+            <a:spAutoFit/>
+          </a:bodyPr>
+          <a:lstStyle/>
+          <a:p>
+            <a:pPr>
+              <a:defRPr sz="900">
+                <a:solidFill>
+                  <a:srgbClr val="787878"/>
+                </a:solidFill>
+                <a:latin typeface="Calibri"/>
+              </a:defRPr>
+            </a:pPr>
+            <a:r>
+              <a:t>GESTURE CONTROLLED WIRELESS 4WD ROBOTIC CAR  |  MINI-PROJECT REPORT</a:t>
+            </a:r>
+          </a:p>
+        </p:txBody>
+      </p:sp>
+      <p:sp>
+        <p:nvSpPr>
+          <p:cNvPr id="6" name="TextBox 5"/>
+          <p:cNvSpPr txBox="1"/>
+          <p:nvPr/>
+        </p:nvSpPr>
+        <p:spPr>
+          <a:xfrm>
+            <a:off x="10058400" y="6217920"/>
+            <a:ext cx="1371600" cy="365760"/>
+          </a:xfrm>
+          <a:prstGeom prst="rect">
+            <a:avLst/>
+          </a:prstGeom>
+          <a:noFill/>
+        </p:spPr>
+        <p:txBody>
+          <a:bodyPr wrap="square" lIns="0" tIns="0" rIns="0" bIns="0">
+            <a:spAutoFit/>
+          </a:bodyPr>
+          <a:lstStyle/>
+          <a:p>
+            <a:pPr algn="r">
+              <a:defRPr sz="900" b="1">
+                <a:solidFill>
+                  <a:srgbClr val="787878"/>
+                </a:solidFill>
+                <a:latin typeface="Calibri"/>
+              </a:defRPr>
+            </a:pPr>
+            <a:r>
+              <a:t>Slide 11 of 12</a:t>
+            </a:r>
+          </a:p>
+        </p:txBody>
+      </p:sp>
+      <p:sp>
+        <p:nvSpPr>
+          <p:cNvPr id="7" name="TextBox 6"/>
+          <p:cNvSpPr txBox="1"/>
+          <p:nvPr/>
+        </p:nvSpPr>
+        <p:spPr>
+          <a:xfrm>
+            <a:off x="914400" y="1645920"/>
+            <a:ext cx="3840480" cy="4114800"/>
+          </a:xfrm>
+          <a:prstGeom prst="rect">
+            <a:avLst/>
+          </a:prstGeom>
+          <a:noFill/>
+        </p:spPr>
+        <p:txBody>
           <a:bodyPr wrap="square">
             <a:spAutoFit/>
           </a:bodyPr>
@@ -3642,15 +4298,15 @@
               <a:spcBef>
                 <a:spcPts val="1200"/>
               </a:spcBef>
-              <a:defRPr sz="1600" b="1">
+              <a:defRPr sz="1500" b="1">
                 <a:solidFill>
                   <a:srgbClr val="000000"/>
                 </a:solidFill>
-                <a:latin typeface="Arial"/>
-              </a:defRPr>
-            </a:pPr>
-            <a:r>
-              <a:t>• Signal Latency:</a:t>
+                <a:latin typeface="Calibri"/>
+              </a:defRPr>
+            </a:pPr>
+            <a:r>
+              <a:t>Signal Latency Metrics</a:t>
             </a:r>
           </a:p>
           <a:p>
@@ -3658,15 +4314,15 @@
               <a:spcAft>
                 <a:spcPts val="800"/>
               </a:spcAft>
-              <a:defRPr sz="1600">
-                <a:solidFill>
-                  <a:srgbClr val="505050"/>
-                </a:solidFill>
-                <a:latin typeface="Arial"/>
-              </a:defRPr>
-            </a:pPr>
-            <a:r>
-              <a:t>  Achieves a highly responsive latency of 8 ms.</a:t>
+              <a:defRPr sz="1250">
+                <a:solidFill>
+                  <a:srgbClr val="3C3C3C"/>
+                </a:solidFill>
+                <a:latin typeface="Calibri"/>
+              </a:defRPr>
+            </a:pPr>
+            <a:r>
+              <a:t>Achieves a highly responsive latency of 8 ms from hand tilt to motor reaction.</a:t>
             </a:r>
           </a:p>
           <a:p>
@@ -3674,15 +4330,15 @@
               <a:spcBef>
                 <a:spcPts val="1200"/>
               </a:spcBef>
-              <a:defRPr sz="1600" b="1">
+              <a:defRPr sz="1500" b="1">
                 <a:solidFill>
                   <a:srgbClr val="000000"/>
                 </a:solidFill>
-                <a:latin typeface="Arial"/>
-              </a:defRPr>
-            </a:pPr>
-            <a:r>
-              <a:t>• Wireless Range:</a:t>
+                <a:latin typeface="Calibri"/>
+              </a:defRPr>
+            </a:pPr>
+            <a:r>
+              <a:t>Wireless Range Testing</a:t>
             </a:r>
           </a:p>
           <a:p>
@@ -3690,15 +4346,15 @@
               <a:spcAft>
                 <a:spcPts val="800"/>
               </a:spcAft>
-              <a:defRPr sz="1600">
-                <a:solidFill>
-                  <a:srgbClr val="505050"/>
-                </a:solidFill>
-                <a:latin typeface="Arial"/>
-              </a:defRPr>
-            </a:pPr>
-            <a:r>
-              <a:t>  Maintains stable wireless communication up to 45 meters.</a:t>
+              <a:defRPr sz="1250">
+                <a:solidFill>
+                  <a:srgbClr val="3C3C3C"/>
+                </a:solidFill>
+                <a:latin typeface="Calibri"/>
+              </a:defRPr>
+            </a:pPr>
+            <a:r>
+              <a:t>Maintains a stable, error-free line-of-sight wireless control range of up to 45 meters.</a:t>
             </a:r>
           </a:p>
           <a:p>
@@ -3706,15 +4362,15 @@
               <a:spcBef>
                 <a:spcPts val="1200"/>
               </a:spcBef>
-              <a:defRPr sz="1600" b="1">
+              <a:defRPr sz="1500" b="1">
                 <a:solidFill>
                   <a:srgbClr val="000000"/>
                 </a:solidFill>
-                <a:latin typeface="Arial"/>
-              </a:defRPr>
-            </a:pPr>
-            <a:r>
-              <a:t>• Operating Time:</a:t>
+                <a:latin typeface="Calibri"/>
+              </a:defRPr>
+            </a:pPr>
+            <a:r>
+              <a:t>Operational Battery Runtime</a:t>
             </a:r>
           </a:p>
           <a:p>
@@ -3722,22 +4378,22 @@
               <a:spcAft>
                 <a:spcPts val="800"/>
               </a:spcAft>
-              <a:defRPr sz="1600">
-                <a:solidFill>
-                  <a:srgbClr val="505050"/>
-                </a:solidFill>
-                <a:latin typeface="Arial"/>
-              </a:defRPr>
-            </a:pPr>
-            <a:r>
-              <a:t>  2200 mAh Li-Ion battery pack delivers 45 minutes of continuous operational runtime.</a:t>
+              <a:defRPr sz="1250">
+                <a:solidFill>
+                  <a:srgbClr val="3C3C3C"/>
+                </a:solidFill>
+                <a:latin typeface="Calibri"/>
+              </a:defRPr>
+            </a:pPr>
+            <a:r>
+              <a:t>Two series 18650 Li-Ion cells supply 45 minutes of continuous run time under full load.</a:t>
             </a:r>
           </a:p>
         </p:txBody>
       </p:sp>
       <p:pic>
         <p:nvPicPr>
-          <p:cNvPr id="4" name="Picture 3" descr="img2.jpeg"/>
+          <p:cNvPr id="8" name="Picture 7" descr="img2.jpeg"/>
           <p:cNvPicPr>
             <a:picLocks noChangeAspect="1"/>
           </p:cNvPicPr>
@@ -3751,17 +4407,22 @@
         </p:blipFill>
         <p:spPr>
           <a:xfrm>
-            <a:off x="5029200" y="1645920"/>
-            <a:ext cx="2194560" cy="4114800"/>
+            <a:off x="4937760" y="1645920"/>
+            <a:ext cx="2194560" cy="4023360"/>
           </a:xfrm>
           <a:prstGeom prst="rect">
             <a:avLst/>
           </a:prstGeom>
+          <a:ln w="12700">
+            <a:solidFill>
+              <a:srgbClr val="DCDCDC"/>
+            </a:solidFill>
+          </a:ln>
         </p:spPr>
       </p:pic>
       <p:pic>
         <p:nvPicPr>
-          <p:cNvPr id="5" name="Picture 4" descr="img4.jpeg"/>
+          <p:cNvPr id="9" name="Picture 8" descr="img4.jpeg"/>
           <p:cNvPicPr>
             <a:picLocks noChangeAspect="1"/>
           </p:cNvPicPr>
@@ -3775,17 +4436,22 @@
         </p:blipFill>
         <p:spPr>
           <a:xfrm>
-            <a:off x="7406640" y="1645920"/>
-            <a:ext cx="2194560" cy="4114800"/>
+            <a:off x="7223760" y="1645920"/>
+            <a:ext cx="2194560" cy="4023360"/>
           </a:xfrm>
           <a:prstGeom prst="rect">
             <a:avLst/>
           </a:prstGeom>
+          <a:ln w="12700">
+            <a:solidFill>
+              <a:srgbClr val="DCDCDC"/>
+            </a:solidFill>
+          </a:ln>
         </p:spPr>
       </p:pic>
       <p:pic>
         <p:nvPicPr>
-          <p:cNvPr id="6" name="Picture 5" descr="img5.jpeg"/>
+          <p:cNvPr id="10" name="Picture 9" descr="img5.jpeg"/>
           <p:cNvPicPr>
             <a:picLocks noChangeAspect="1"/>
           </p:cNvPicPr>
@@ -3799,12 +4465,17 @@
         </p:blipFill>
         <p:spPr>
           <a:xfrm>
-            <a:off x="9784080" y="1645920"/>
-            <a:ext cx="2194560" cy="4114800"/>
+            <a:off x="9509760" y="1645920"/>
+            <a:ext cx="2194560" cy="4023360"/>
           </a:xfrm>
           <a:prstGeom prst="rect">
             <a:avLst/>
           </a:prstGeom>
+          <a:ln w="12700">
+            <a:solidFill>
+              <a:srgbClr val="DCDCDC"/>
+            </a:solidFill>
+          </a:ln>
         </p:spPr>
       </p:pic>
     </p:spTree>
@@ -3833,7 +4504,7 @@
         </p:nvSpPr>
         <p:spPr>
           <a:xfrm>
-            <a:off x="731520" y="457200"/>
+            <a:off x="731520" y="365760"/>
             <a:ext cx="10728655" cy="731520"/>
           </a:xfrm>
           <a:prstGeom prst="rect">
@@ -3842,17 +4513,17 @@
           <a:noFill/>
         </p:spPr>
         <p:txBody>
-          <a:bodyPr wrap="square">
+          <a:bodyPr wrap="square" lIns="0" tIns="0" rIns="0" bIns="0">
             <a:spAutoFit/>
           </a:bodyPr>
           <a:lstStyle/>
           <a:p>
             <a:pPr>
-              <a:defRPr sz="3600" b="1">
+              <a:defRPr sz="3200" b="1">
                 <a:solidFill>
                   <a:srgbClr val="000000"/>
                 </a:solidFill>
-                <a:latin typeface="Arial"/>
+                <a:latin typeface="Calibri"/>
               </a:defRPr>
             </a:pPr>
             <a:r>
@@ -3863,14 +4534,104 @@
       </p:sp>
       <p:sp>
         <p:nvSpPr>
-          <p:cNvPr id="3" name="TextBox 2"/>
+          <p:cNvPr id="3" name="Rectangle 2"/>
+          <p:cNvSpPr/>
+          <p:nvPr/>
+        </p:nvSpPr>
+        <p:spPr>
+          <a:xfrm>
+            <a:off x="731520" y="1097280"/>
+            <a:ext cx="10728655" cy="13716"/>
+          </a:xfrm>
+          <a:prstGeom prst="rect">
+            <a:avLst/>
+          </a:prstGeom>
+          <a:solidFill>
+            <a:srgbClr val="000000"/>
+          </a:solidFill>
+          <a:ln>
+            <a:solidFill>
+              <a:srgbClr val="000000"/>
+            </a:solidFill>
+          </a:ln>
+        </p:spPr>
+        <p:style>
+          <a:lnRef idx="1">
+            <a:schemeClr val="accent1"/>
+          </a:lnRef>
+          <a:fillRef idx="3">
+            <a:schemeClr val="accent1"/>
+          </a:fillRef>
+          <a:effectRef idx="2">
+            <a:schemeClr val="accent1"/>
+          </a:effectRef>
+          <a:fontRef idx="minor">
+            <a:schemeClr val="lt1"/>
+          </a:fontRef>
+        </p:style>
+        <p:txBody>
+          <a:bodyPr rtlCol="0" anchor="ctr"/>
+          <a:lstStyle/>
+          <a:p>
+            <a:pPr algn="ctr"/>
+          </a:p>
+        </p:txBody>
+      </p:sp>
+      <p:sp>
+        <p:nvSpPr>
+          <p:cNvPr id="4" name="Rectangle 3"/>
+          <p:cNvSpPr/>
+          <p:nvPr/>
+        </p:nvSpPr>
+        <p:spPr>
+          <a:xfrm>
+            <a:off x="731520" y="6126480"/>
+            <a:ext cx="10728655" cy="9144"/>
+          </a:xfrm>
+          <a:prstGeom prst="rect">
+            <a:avLst/>
+          </a:prstGeom>
+          <a:solidFill>
+            <a:srgbClr val="DCDCDC"/>
+          </a:solidFill>
+          <a:ln>
+            <a:solidFill>
+              <a:srgbClr val="DCDCDC"/>
+            </a:solidFill>
+          </a:ln>
+        </p:spPr>
+        <p:style>
+          <a:lnRef idx="1">
+            <a:schemeClr val="accent1"/>
+          </a:lnRef>
+          <a:fillRef idx="3">
+            <a:schemeClr val="accent1"/>
+          </a:fillRef>
+          <a:effectRef idx="2">
+            <a:schemeClr val="accent1"/>
+          </a:effectRef>
+          <a:fontRef idx="minor">
+            <a:schemeClr val="lt1"/>
+          </a:fontRef>
+        </p:style>
+        <p:txBody>
+          <a:bodyPr rtlCol="0" anchor="ctr"/>
+          <a:lstStyle/>
+          <a:p>
+            <a:pPr algn="ctr"/>
+          </a:p>
+        </p:txBody>
+      </p:sp>
+      <p:sp>
+        <p:nvSpPr>
+          <p:cNvPr id="5" name="TextBox 4"/>
           <p:cNvSpPr txBox="1"/>
           <p:nvPr/>
         </p:nvSpPr>
         <p:spPr>
           <a:xfrm>
-            <a:off x="731520" y="1645920"/>
-            <a:ext cx="10728655" cy="4572000"/>
+            <a:off x="731520" y="6217920"/>
+            <a:ext cx="8229600" cy="365760"/>
           </a:xfrm>
           <a:prstGeom prst="rect">
             <a:avLst/>
@@ -3878,56 +4639,96 @@
           <a:noFill/>
         </p:spPr>
         <p:txBody>
+          <a:bodyPr wrap="square" lIns="0" tIns="0" rIns="0" bIns="0">
+            <a:spAutoFit/>
+          </a:bodyPr>
+          <a:lstStyle/>
+          <a:p>
+            <a:pPr>
+              <a:defRPr sz="900">
+                <a:solidFill>
+                  <a:srgbClr val="787878"/>
+                </a:solidFill>
+                <a:latin typeface="Calibri"/>
+              </a:defRPr>
+            </a:pPr>
+            <a:r>
+              <a:t>GESTURE CONTROLLED WIRELESS 4WD ROBOTIC CAR  |  MINI-PROJECT REPORT</a:t>
+            </a:r>
+          </a:p>
+        </p:txBody>
+      </p:sp>
+      <p:sp>
+        <p:nvSpPr>
+          <p:cNvPr id="6" name="TextBox 5"/>
+          <p:cNvSpPr txBox="1"/>
+          <p:nvPr/>
+        </p:nvSpPr>
+        <p:spPr>
+          <a:xfrm>
+            <a:off x="10058400" y="6217920"/>
+            <a:ext cx="1371600" cy="365760"/>
+          </a:xfrm>
+          <a:prstGeom prst="rect">
+            <a:avLst/>
+          </a:prstGeom>
+          <a:noFill/>
+        </p:spPr>
+        <p:txBody>
+          <a:bodyPr wrap="square" lIns="0" tIns="0" rIns="0" bIns="0">
+            <a:spAutoFit/>
+          </a:bodyPr>
+          <a:lstStyle/>
+          <a:p>
+            <a:pPr algn="r">
+              <a:defRPr sz="900" b="1">
+                <a:solidFill>
+                  <a:srgbClr val="787878"/>
+                </a:solidFill>
+                <a:latin typeface="Calibri"/>
+              </a:defRPr>
+            </a:pPr>
+            <a:r>
+              <a:t>Slide 12 of 12</a:t>
+            </a:r>
+          </a:p>
+        </p:txBody>
+      </p:sp>
+      <p:sp>
+        <p:nvSpPr>
+          <p:cNvPr id="7" name="TextBox 6"/>
+          <p:cNvSpPr txBox="1"/>
+          <p:nvPr/>
+        </p:nvSpPr>
+        <p:spPr>
+          <a:xfrm>
+            <a:off x="914400" y="1645920"/>
+            <a:ext cx="10332720" cy="4114800"/>
+          </a:xfrm>
+          <a:prstGeom prst="rect">
+            <a:avLst/>
+          </a:prstGeom>
+          <a:noFill/>
+        </p:spPr>
+        <p:txBody>
           <a:bodyPr wrap="square">
             <a:spAutoFit/>
           </a:bodyPr>
           <a:lstStyle/>
           <a:p>
             <a:pPr>
-              <a:spcAft>
-                <a:spcPts val="1600"/>
-              </a:spcAft>
-              <a:defRPr sz="1800">
-                <a:solidFill>
-                  <a:srgbClr val="505050"/>
-                </a:solidFill>
-                <a:latin typeface="Arial"/>
-              </a:defRPr>
-            </a:pPr>
-            <a:r>
-              <a:t>• Key System Realization: Successfully developed a low-latency connectionless ESP-NOW mobile robotic vehicle driven by wearable MPU6050 accelerometer wrist tilt gestures.</a:t>
-            </a:r>
-          </a:p>
-          <a:p>
-            <a:pPr>
-              <a:spcAft>
-                <a:spcPts val="1600"/>
-              </a:spcAft>
-              <a:defRPr sz="1800">
-                <a:solidFill>
-                  <a:srgbClr val="505050"/>
-                </a:solidFill>
-                <a:latin typeface="Arial"/>
-              </a:defRPr>
-            </a:pPr>
-            <a:r>
-              <a:t>• Functional Execution: Physical calibration and testing confirmed instant steering response (Neutral, Forward, Reverse, Lateral Left/Right, Diagonal Drift) with high noise immunity.</a:t>
-            </a:r>
-          </a:p>
-          <a:p>
-            <a:pPr>
               <a:spcBef>
                 <a:spcPts val="1200"/>
               </a:spcBef>
-              <a:defRPr sz="1800" b="1">
+              <a:defRPr sz="1500" b="1">
                 <a:solidFill>
                   <a:srgbClr val="000000"/>
                 </a:solidFill>
-                <a:latin typeface="Arial"/>
-              </a:defRPr>
-            </a:pPr>
-            <a:r>
-              <a:t>• Core Future Directions:</a:t>
+                <a:latin typeface="Calibri"/>
+              </a:defRPr>
+            </a:pPr>
+            <a:r>
+              <a:t>Successful System Realization</a:t>
             </a:r>
           </a:p>
           <a:p>
@@ -3935,15 +4736,31 @@
               <a:spcAft>
                 <a:spcPts val="800"/>
               </a:spcAft>
-              <a:defRPr sz="1600">
-                <a:solidFill>
-                  <a:srgbClr val="505050"/>
-                </a:solidFill>
-                <a:latin typeface="Arial"/>
-              </a:defRPr>
-            </a:pPr>
-            <a:r>
-              <a:t>  - Replace L298N drivers with high-efficiency TB6612FNG drivers to optimize current draw.</a:t>
+              <a:defRPr sz="1250">
+                <a:solidFill>
+                  <a:srgbClr val="3C3C3C"/>
+                </a:solidFill>
+                <a:latin typeface="Calibri"/>
+              </a:defRPr>
+            </a:pPr>
+            <a:r>
+              <a:t>Realized a low-latency connectionless ESP-NOW mobile robotic vehicle driven by wearable MPU6050 accelerometer wrist tilt gestures, providing a highly intuitive and responsive HMI interface.</a:t>
+            </a:r>
+          </a:p>
+          <a:p>
+            <a:pPr>
+              <a:spcBef>
+                <a:spcPts val="1200"/>
+              </a:spcBef>
+              <a:defRPr sz="1500" b="1">
+                <a:solidFill>
+                  <a:srgbClr val="000000"/>
+                </a:solidFill>
+                <a:latin typeface="Calibri"/>
+              </a:defRPr>
+            </a:pPr>
+            <a:r>
+              <a:t>Stable Physical Verification</a:t>
             </a:r>
           </a:p>
           <a:p>
@@ -3951,15 +4768,31 @@
               <a:spcAft>
                 <a:spcPts val="800"/>
               </a:spcAft>
-              <a:defRPr sz="1600">
-                <a:solidFill>
-                  <a:srgbClr val="505050"/>
-                </a:solidFill>
-                <a:latin typeface="Arial"/>
-              </a:defRPr>
-            </a:pPr>
-            <a:r>
-              <a:t>  - Integrate ultrasonic and LiDAR sensors to implement autonomous obstacle avoidance.</a:t>
+              <a:defRPr sz="1250">
+                <a:solidFill>
+                  <a:srgbClr val="3C3C3C"/>
+                </a:solidFill>
+                <a:latin typeface="Calibri"/>
+              </a:defRPr>
+            </a:pPr>
+            <a:r>
+              <a:t>System calibration and trials verified instant directional response (Forward, Reverse, Lateral Left/Right, Diagonal Drift) with high noise immunity and battery efficiency.</a:t>
+            </a:r>
+          </a:p>
+          <a:p>
+            <a:pPr>
+              <a:spcBef>
+                <a:spcPts val="1200"/>
+              </a:spcBef>
+              <a:defRPr sz="1500" b="1">
+                <a:solidFill>
+                  <a:srgbClr val="000000"/>
+                </a:solidFill>
+                <a:latin typeface="Calibri"/>
+              </a:defRPr>
+            </a:pPr>
+            <a:r>
+              <a:t>Future Research and Enhancements</a:t>
             </a:r>
           </a:p>
           <a:p>
@@ -3967,31 +4800,15 @@
               <a:spcAft>
                 <a:spcPts val="800"/>
               </a:spcAft>
-              <a:defRPr sz="1600">
-                <a:solidFill>
-                  <a:srgbClr val="505050"/>
-                </a:solidFill>
-                <a:latin typeface="Arial"/>
-              </a:defRPr>
-            </a:pPr>
-            <a:r>
-              <a:t>  - Implement sensor fusion and Kalman filtering for precise gyroscope angle tracking.</a:t>
-            </a:r>
-          </a:p>
-          <a:p>
-            <a:pPr>
-              <a:spcAft>
-                <a:spcPts val="800"/>
-              </a:spcAft>
-              <a:defRPr sz="1600">
-                <a:solidFill>
-                  <a:srgbClr val="505050"/>
-                </a:solidFill>
-                <a:latin typeface="Arial"/>
-              </a:defRPr>
-            </a:pPr>
-            <a:r>
-              <a:t>  - Integrate with the Robot Operating System (ROS) for autonomous warehouse fleet routing.</a:t>
+              <a:defRPr sz="1250">
+                <a:solidFill>
+                  <a:srgbClr val="3C3C3C"/>
+                </a:solidFill>
+                <a:latin typeface="Calibri"/>
+              </a:defRPr>
+            </a:pPr>
+            <a:r>
+              <a:t>Planned expansions include replacing L298N drivers with high-efficiency TB6612FNG drivers, integrating ultrasonic and LiDAR sensors for autonomous obstacle avoidance, implementing Kalman filters for sensor fusion, and integrating with the Robot Operating System (ROS) for warehouse routing.</a:t>
             </a:r>
           </a:p>
         </p:txBody>
@@ -4022,7 +4839,7 @@
         </p:nvSpPr>
         <p:spPr>
           <a:xfrm>
-            <a:off x="731520" y="457200"/>
+            <a:off x="731520" y="365760"/>
             <a:ext cx="10728655" cy="731520"/>
           </a:xfrm>
           <a:prstGeom prst="rect">
@@ -4031,17 +4848,17 @@
           <a:noFill/>
         </p:spPr>
         <p:txBody>
-          <a:bodyPr wrap="square">
+          <a:bodyPr wrap="square" lIns="0" tIns="0" rIns="0" bIns="0">
             <a:spAutoFit/>
           </a:bodyPr>
           <a:lstStyle/>
           <a:p>
             <a:pPr>
-              <a:defRPr sz="3600" b="1">
+              <a:defRPr sz="3200" b="1">
                 <a:solidFill>
                   <a:srgbClr val="000000"/>
                 </a:solidFill>
-                <a:latin typeface="Arial"/>
+                <a:latin typeface="Calibri"/>
               </a:defRPr>
             </a:pPr>
             <a:r>
@@ -4052,14 +4869,104 @@
       </p:sp>
       <p:sp>
         <p:nvSpPr>
-          <p:cNvPr id="3" name="TextBox 2"/>
+          <p:cNvPr id="3" name="Rectangle 2"/>
+          <p:cNvSpPr/>
+          <p:nvPr/>
+        </p:nvSpPr>
+        <p:spPr>
+          <a:xfrm>
+            <a:off x="731520" y="1097280"/>
+            <a:ext cx="10728655" cy="13716"/>
+          </a:xfrm>
+          <a:prstGeom prst="rect">
+            <a:avLst/>
+          </a:prstGeom>
+          <a:solidFill>
+            <a:srgbClr val="000000"/>
+          </a:solidFill>
+          <a:ln>
+            <a:solidFill>
+              <a:srgbClr val="000000"/>
+            </a:solidFill>
+          </a:ln>
+        </p:spPr>
+        <p:style>
+          <a:lnRef idx="1">
+            <a:schemeClr val="accent1"/>
+          </a:lnRef>
+          <a:fillRef idx="3">
+            <a:schemeClr val="accent1"/>
+          </a:fillRef>
+          <a:effectRef idx="2">
+            <a:schemeClr val="accent1"/>
+          </a:effectRef>
+          <a:fontRef idx="minor">
+            <a:schemeClr val="lt1"/>
+          </a:fontRef>
+        </p:style>
+        <p:txBody>
+          <a:bodyPr rtlCol="0" anchor="ctr"/>
+          <a:lstStyle/>
+          <a:p>
+            <a:pPr algn="ctr"/>
+          </a:p>
+        </p:txBody>
+      </p:sp>
+      <p:sp>
+        <p:nvSpPr>
+          <p:cNvPr id="4" name="Rectangle 3"/>
+          <p:cNvSpPr/>
+          <p:nvPr/>
+        </p:nvSpPr>
+        <p:spPr>
+          <a:xfrm>
+            <a:off x="731520" y="6126480"/>
+            <a:ext cx="10728655" cy="9144"/>
+          </a:xfrm>
+          <a:prstGeom prst="rect">
+            <a:avLst/>
+          </a:prstGeom>
+          <a:solidFill>
+            <a:srgbClr val="DCDCDC"/>
+          </a:solidFill>
+          <a:ln>
+            <a:solidFill>
+              <a:srgbClr val="DCDCDC"/>
+            </a:solidFill>
+          </a:ln>
+        </p:spPr>
+        <p:style>
+          <a:lnRef idx="1">
+            <a:schemeClr val="accent1"/>
+          </a:lnRef>
+          <a:fillRef idx="3">
+            <a:schemeClr val="accent1"/>
+          </a:fillRef>
+          <a:effectRef idx="2">
+            <a:schemeClr val="accent1"/>
+          </a:effectRef>
+          <a:fontRef idx="minor">
+            <a:schemeClr val="lt1"/>
+          </a:fontRef>
+        </p:style>
+        <p:txBody>
+          <a:bodyPr rtlCol="0" anchor="ctr"/>
+          <a:lstStyle/>
+          <a:p>
+            <a:pPr algn="ctr"/>
+          </a:p>
+        </p:txBody>
+      </p:sp>
+      <p:sp>
+        <p:nvSpPr>
+          <p:cNvPr id="5" name="TextBox 4"/>
           <p:cNvSpPr txBox="1"/>
           <p:nvPr/>
         </p:nvSpPr>
         <p:spPr>
           <a:xfrm>
-            <a:off x="731520" y="1645920"/>
-            <a:ext cx="10728655" cy="4572000"/>
+            <a:off x="731520" y="6217920"/>
+            <a:ext cx="8229600" cy="365760"/>
           </a:xfrm>
           <a:prstGeom prst="rect">
             <a:avLst/>
@@ -4067,72 +4974,208 @@
           <a:noFill/>
         </p:spPr>
         <p:txBody>
+          <a:bodyPr wrap="square" lIns="0" tIns="0" rIns="0" bIns="0">
+            <a:spAutoFit/>
+          </a:bodyPr>
+          <a:lstStyle/>
+          <a:p>
+            <a:pPr>
+              <a:defRPr sz="900">
+                <a:solidFill>
+                  <a:srgbClr val="787878"/>
+                </a:solidFill>
+                <a:latin typeface="Calibri"/>
+              </a:defRPr>
+            </a:pPr>
+            <a:r>
+              <a:t>GESTURE CONTROLLED WIRELESS 4WD ROBOTIC CAR  |  MINI-PROJECT REPORT</a:t>
+            </a:r>
+          </a:p>
+        </p:txBody>
+      </p:sp>
+      <p:sp>
+        <p:nvSpPr>
+          <p:cNvPr id="6" name="TextBox 5"/>
+          <p:cNvSpPr txBox="1"/>
+          <p:nvPr/>
+        </p:nvSpPr>
+        <p:spPr>
+          <a:xfrm>
+            <a:off x="10058400" y="6217920"/>
+            <a:ext cx="1371600" cy="365760"/>
+          </a:xfrm>
+          <a:prstGeom prst="rect">
+            <a:avLst/>
+          </a:prstGeom>
+          <a:noFill/>
+        </p:spPr>
+        <p:txBody>
+          <a:bodyPr wrap="square" lIns="0" tIns="0" rIns="0" bIns="0">
+            <a:spAutoFit/>
+          </a:bodyPr>
+          <a:lstStyle/>
+          <a:p>
+            <a:pPr algn="r">
+              <a:defRPr sz="900" b="1">
+                <a:solidFill>
+                  <a:srgbClr val="787878"/>
+                </a:solidFill>
+                <a:latin typeface="Calibri"/>
+              </a:defRPr>
+            </a:pPr>
+            <a:r>
+              <a:t>Slide 2 of 12</a:t>
+            </a:r>
+          </a:p>
+        </p:txBody>
+      </p:sp>
+      <p:sp>
+        <p:nvSpPr>
+          <p:cNvPr id="7" name="TextBox 6"/>
+          <p:cNvSpPr txBox="1"/>
+          <p:nvPr/>
+        </p:nvSpPr>
+        <p:spPr>
+          <a:xfrm>
+            <a:off x="914400" y="1645920"/>
+            <a:ext cx="10332720" cy="4114800"/>
+          </a:xfrm>
+          <a:prstGeom prst="rect">
+            <a:avLst/>
+          </a:prstGeom>
+          <a:noFill/>
+        </p:spPr>
+        <p:txBody>
           <a:bodyPr wrap="square">
             <a:spAutoFit/>
           </a:bodyPr>
           <a:lstStyle/>
           <a:p>
             <a:pPr>
+              <a:spcBef>
+                <a:spcPts val="1200"/>
+              </a:spcBef>
+              <a:defRPr sz="1500" b="1">
+                <a:solidFill>
+                  <a:srgbClr val="000000"/>
+                </a:solidFill>
+                <a:latin typeface="Calibri"/>
+              </a:defRPr>
+            </a:pPr>
+            <a:r>
+              <a:t>Intuitive Human-Machine Interfaces (HMI)</a:t>
+            </a:r>
+          </a:p>
+          <a:p>
+            <a:pPr>
               <a:spcAft>
-                <a:spcPts val="2400"/>
+                <a:spcPts val="800"/>
               </a:spcAft>
-              <a:defRPr sz="1800">
-                <a:solidFill>
-                  <a:srgbClr val="505050"/>
-                </a:solidFill>
-                <a:latin typeface="Arial"/>
-              </a:defRPr>
-            </a:pPr>
-            <a:r>
-              <a:t>• Natural Human-Machine Interfaces (HMI): Traditional joysticks and remote controllers require physical contact and manual dexterity. This project provides an intuitive alternative.</a:t>
+              <a:defRPr sz="1250">
+                <a:solidFill>
+                  <a:srgbClr val="3C3C3C"/>
+                </a:solidFill>
+                <a:latin typeface="Calibri"/>
+              </a:defRPr>
+            </a:pPr>
+            <a:r>
+              <a:t>Standard controllers (joysticks, remote control pads) require physical contact, manual dexterity, and training. Gesture-based steering offers an intuitive, hands-free interface.</a:t>
+            </a:r>
+          </a:p>
+          <a:p>
+            <a:pPr>
+              <a:spcBef>
+                <a:spcPts val="1200"/>
+              </a:spcBef>
+              <a:defRPr sz="1500" b="1">
+                <a:solidFill>
+                  <a:srgbClr val="000000"/>
+                </a:solidFill>
+                <a:latin typeface="Calibri"/>
+              </a:defRPr>
+            </a:pPr>
+            <a:r>
+              <a:t>Gesture-Based Motion Mapping</a:t>
             </a:r>
           </a:p>
           <a:p>
             <a:pPr>
               <a:spcAft>
-                <a:spcPts val="2400"/>
+                <a:spcPts val="800"/>
               </a:spcAft>
-              <a:defRPr sz="1800">
-                <a:solidFill>
-                  <a:srgbClr val="505050"/>
-                </a:solidFill>
-                <a:latin typeface="Arial"/>
-              </a:defRPr>
-            </a:pPr>
-            <a:r>
-              <a:t>• Gesture-Based Motion Control: Translates natural wrist tilt gestures (Pitch and Roll orientation angles) directly into mobile chassis steering vectors.</a:t>
+              <a:defRPr sz="1250">
+                <a:solidFill>
+                  <a:srgbClr val="3C3C3C"/>
+                </a:solidFill>
+                <a:latin typeface="Calibri"/>
+              </a:defRPr>
+            </a:pPr>
+            <a:r>
+              <a:t>Translates natural hand tilts into system command vectors. Tilting the hand forward, backward, left, or right coordinates physical direction changes in real-time.</a:t>
+            </a:r>
+          </a:p>
+          <a:p>
+            <a:pPr>
+              <a:spcBef>
+                <a:spcPts val="1200"/>
+              </a:spcBef>
+              <a:defRPr sz="1500" b="1">
+                <a:solidFill>
+                  <a:srgbClr val="000000"/>
+                </a:solidFill>
+                <a:latin typeface="Calibri"/>
+              </a:defRPr>
+            </a:pPr>
+            <a:r>
+              <a:t>ESP32/ESP-NOW Architecture</a:t>
             </a:r>
           </a:p>
           <a:p>
             <a:pPr>
               <a:spcAft>
-                <a:spcPts val="2400"/>
+                <a:spcPts val="800"/>
               </a:spcAft>
-              <a:defRPr sz="1800">
-                <a:solidFill>
-                  <a:srgbClr val="505050"/>
-                </a:solidFill>
-                <a:latin typeface="Arial"/>
-              </a:defRPr>
-            </a:pPr>
-            <a:r>
-              <a:t>• ESP32 Microcontrollers: High-performance microcontrollers establish a direct peer-to-peer 2.4 GHz connection without a wireless router.</a:t>
+              <a:defRPr sz="1250">
+                <a:solidFill>
+                  <a:srgbClr val="3C3C3C"/>
+                </a:solidFill>
+                <a:latin typeface="Calibri"/>
+              </a:defRPr>
+            </a:pPr>
+            <a:r>
+              <a:t>Using Espressif's connectionless protocol reduces transmission latency to a minimum, bypassing the handshaking delays and router pairing required in traditional Wi-Fi setups.</a:t>
+            </a:r>
+          </a:p>
+          <a:p>
+            <a:pPr>
+              <a:spcBef>
+                <a:spcPts val="1200"/>
+              </a:spcBef>
+              <a:defRPr sz="1500" b="1">
+                <a:solidFill>
+                  <a:srgbClr val="000000"/>
+                </a:solidFill>
+                <a:latin typeface="Calibri"/>
+              </a:defRPr>
+            </a:pPr>
+            <a:r>
+              <a:t>Real-World Application Scope</a:t>
             </a:r>
           </a:p>
           <a:p>
             <a:pPr>
               <a:spcAft>
-                <a:spcPts val="2400"/>
+                <a:spcPts val="800"/>
               </a:spcAft>
-              <a:defRPr sz="1800">
-                <a:solidFill>
-                  <a:srgbClr val="505050"/>
-                </a:solidFill>
-                <a:latin typeface="Arial"/>
-              </a:defRPr>
-            </a:pPr>
-            <a:r>
-              <a:t>• Core System Applications: Ideal for heavy warehouse logistics, search-and-rescue operations in hazardous environments, and assisting individuals with limited mobility.</a:t>
+              <a:defRPr sz="1250">
+                <a:solidFill>
+                  <a:srgbClr val="3C3C3C"/>
+                </a:solidFill>
+                <a:latin typeface="Calibri"/>
+              </a:defRPr>
+            </a:pPr>
+            <a:r>
+              <a:t>Highly applicable to heavy warehouse logistics, search-and-rescue assistance in hazardous areas, and assistive mobility interfaces for disabled individuals.</a:t>
             </a:r>
           </a:p>
         </p:txBody>
@@ -4163,7 +5206,7 @@
         </p:nvSpPr>
         <p:spPr>
           <a:xfrm>
-            <a:off x="731520" y="457200"/>
+            <a:off x="731520" y="365760"/>
             <a:ext cx="10728655" cy="731520"/>
           </a:xfrm>
           <a:prstGeom prst="rect">
@@ -4172,17 +5215,17 @@
           <a:noFill/>
         </p:spPr>
         <p:txBody>
-          <a:bodyPr wrap="square">
+          <a:bodyPr wrap="square" lIns="0" tIns="0" rIns="0" bIns="0">
             <a:spAutoFit/>
           </a:bodyPr>
           <a:lstStyle/>
           <a:p>
             <a:pPr>
-              <a:defRPr sz="3600" b="1">
+              <a:defRPr sz="3200" b="1">
                 <a:solidFill>
                   <a:srgbClr val="000000"/>
                 </a:solidFill>
-                <a:latin typeface="Arial"/>
+                <a:latin typeface="Calibri"/>
               </a:defRPr>
             </a:pPr>
             <a:r>
@@ -4193,14 +5236,104 @@
       </p:sp>
       <p:sp>
         <p:nvSpPr>
-          <p:cNvPr id="3" name="TextBox 2"/>
+          <p:cNvPr id="3" name="Rectangle 2"/>
+          <p:cNvSpPr/>
+          <p:nvPr/>
+        </p:nvSpPr>
+        <p:spPr>
+          <a:xfrm>
+            <a:off x="731520" y="1097280"/>
+            <a:ext cx="10728655" cy="13716"/>
+          </a:xfrm>
+          <a:prstGeom prst="rect">
+            <a:avLst/>
+          </a:prstGeom>
+          <a:solidFill>
+            <a:srgbClr val="000000"/>
+          </a:solidFill>
+          <a:ln>
+            <a:solidFill>
+              <a:srgbClr val="000000"/>
+            </a:solidFill>
+          </a:ln>
+        </p:spPr>
+        <p:style>
+          <a:lnRef idx="1">
+            <a:schemeClr val="accent1"/>
+          </a:lnRef>
+          <a:fillRef idx="3">
+            <a:schemeClr val="accent1"/>
+          </a:fillRef>
+          <a:effectRef idx="2">
+            <a:schemeClr val="accent1"/>
+          </a:effectRef>
+          <a:fontRef idx="minor">
+            <a:schemeClr val="lt1"/>
+          </a:fontRef>
+        </p:style>
+        <p:txBody>
+          <a:bodyPr rtlCol="0" anchor="ctr"/>
+          <a:lstStyle/>
+          <a:p>
+            <a:pPr algn="ctr"/>
+          </a:p>
+        </p:txBody>
+      </p:sp>
+      <p:sp>
+        <p:nvSpPr>
+          <p:cNvPr id="4" name="Rectangle 3"/>
+          <p:cNvSpPr/>
+          <p:nvPr/>
+        </p:nvSpPr>
+        <p:spPr>
+          <a:xfrm>
+            <a:off x="731520" y="6126480"/>
+            <a:ext cx="10728655" cy="9144"/>
+          </a:xfrm>
+          <a:prstGeom prst="rect">
+            <a:avLst/>
+          </a:prstGeom>
+          <a:solidFill>
+            <a:srgbClr val="DCDCDC"/>
+          </a:solidFill>
+          <a:ln>
+            <a:solidFill>
+              <a:srgbClr val="DCDCDC"/>
+            </a:solidFill>
+          </a:ln>
+        </p:spPr>
+        <p:style>
+          <a:lnRef idx="1">
+            <a:schemeClr val="accent1"/>
+          </a:lnRef>
+          <a:fillRef idx="3">
+            <a:schemeClr val="accent1"/>
+          </a:fillRef>
+          <a:effectRef idx="2">
+            <a:schemeClr val="accent1"/>
+          </a:effectRef>
+          <a:fontRef idx="minor">
+            <a:schemeClr val="lt1"/>
+          </a:fontRef>
+        </p:style>
+        <p:txBody>
+          <a:bodyPr rtlCol="0" anchor="ctr"/>
+          <a:lstStyle/>
+          <a:p>
+            <a:pPr algn="ctr"/>
+          </a:p>
+        </p:txBody>
+      </p:sp>
+      <p:sp>
+        <p:nvSpPr>
+          <p:cNvPr id="5" name="TextBox 4"/>
           <p:cNvSpPr txBox="1"/>
           <p:nvPr/>
         </p:nvSpPr>
         <p:spPr>
           <a:xfrm>
-            <a:off x="731520" y="1645920"/>
-            <a:ext cx="5029200" cy="4572000"/>
+            <a:off x="731520" y="6217920"/>
+            <a:ext cx="8229600" cy="365760"/>
           </a:xfrm>
           <a:prstGeom prst="rect">
             <a:avLst/>
@@ -4208,6 +5341,78 @@
           <a:noFill/>
         </p:spPr>
         <p:txBody>
+          <a:bodyPr wrap="square" lIns="0" tIns="0" rIns="0" bIns="0">
+            <a:spAutoFit/>
+          </a:bodyPr>
+          <a:lstStyle/>
+          <a:p>
+            <a:pPr>
+              <a:defRPr sz="900">
+                <a:solidFill>
+                  <a:srgbClr val="787878"/>
+                </a:solidFill>
+                <a:latin typeface="Calibri"/>
+              </a:defRPr>
+            </a:pPr>
+            <a:r>
+              <a:t>GESTURE CONTROLLED WIRELESS 4WD ROBOTIC CAR  |  MINI-PROJECT REPORT</a:t>
+            </a:r>
+          </a:p>
+        </p:txBody>
+      </p:sp>
+      <p:sp>
+        <p:nvSpPr>
+          <p:cNvPr id="6" name="TextBox 5"/>
+          <p:cNvSpPr txBox="1"/>
+          <p:nvPr/>
+        </p:nvSpPr>
+        <p:spPr>
+          <a:xfrm>
+            <a:off x="10058400" y="6217920"/>
+            <a:ext cx="1371600" cy="365760"/>
+          </a:xfrm>
+          <a:prstGeom prst="rect">
+            <a:avLst/>
+          </a:prstGeom>
+          <a:noFill/>
+        </p:spPr>
+        <p:txBody>
+          <a:bodyPr wrap="square" lIns="0" tIns="0" rIns="0" bIns="0">
+            <a:spAutoFit/>
+          </a:bodyPr>
+          <a:lstStyle/>
+          <a:p>
+            <a:pPr algn="r">
+              <a:defRPr sz="900" b="1">
+                <a:solidFill>
+                  <a:srgbClr val="787878"/>
+                </a:solidFill>
+                <a:latin typeface="Calibri"/>
+              </a:defRPr>
+            </a:pPr>
+            <a:r>
+              <a:t>Slide 3 of 12</a:t>
+            </a:r>
+          </a:p>
+        </p:txBody>
+      </p:sp>
+      <p:sp>
+        <p:nvSpPr>
+          <p:cNvPr id="7" name="TextBox 6"/>
+          <p:cNvSpPr txBox="1"/>
+          <p:nvPr/>
+        </p:nvSpPr>
+        <p:spPr>
+          <a:xfrm>
+            <a:off x="914400" y="1645920"/>
+            <a:ext cx="4754880" cy="4114800"/>
+          </a:xfrm>
+          <a:prstGeom prst="rect">
+            <a:avLst/>
+          </a:prstGeom>
+          <a:noFill/>
+        </p:spPr>
+        <p:txBody>
           <a:bodyPr wrap="square">
             <a:spAutoFit/>
           </a:bodyPr>
@@ -4217,15 +5422,15 @@
               <a:spcBef>
                 <a:spcPts val="1200"/>
               </a:spcBef>
-              <a:defRPr sz="1600" b="1">
+              <a:defRPr sz="1500" b="1">
                 <a:solidFill>
                   <a:srgbClr val="000000"/>
                 </a:solidFill>
-                <a:latin typeface="Arial"/>
-              </a:defRPr>
-            </a:pPr>
-            <a:r>
-              <a:t>• Transmitter Wearable Glove:</a:t>
+                <a:latin typeface="Calibri"/>
+              </a:defRPr>
+            </a:pPr>
+            <a:r>
+              <a:t>Transmitter Wearable Glove</a:t>
             </a:r>
           </a:p>
           <a:p>
@@ -4233,15 +5438,15 @@
               <a:spcAft>
                 <a:spcPts val="800"/>
               </a:spcAft>
-              <a:defRPr sz="1600">
-                <a:solidFill>
-                  <a:srgbClr val="505050"/>
-                </a:solidFill>
-                <a:latin typeface="Arial"/>
-              </a:defRPr>
-            </a:pPr>
-            <a:r>
-              <a:t>  Interfaces the MPU6050 6-axis motion sensor with the transmitter ESP32 to compute static tilt angles.</a:t>
+              <a:defRPr sz="1250">
+                <a:solidFill>
+                  <a:srgbClr val="3C3C3C"/>
+                </a:solidFill>
+                <a:latin typeface="Calibri"/>
+              </a:defRPr>
+            </a:pPr>
+            <a:r>
+              <a:t>Interfaced with the MPU6050 motion sensor. Tracks static gravity vectors to compute wrist orientation (Pitch and Roll).</a:t>
             </a:r>
           </a:p>
           <a:p>
@@ -4249,15 +5454,15 @@
               <a:spcBef>
                 <a:spcPts val="1200"/>
               </a:spcBef>
-              <a:defRPr sz="1600" b="1">
+              <a:defRPr sz="1500" b="1">
                 <a:solidFill>
                   <a:srgbClr val="000000"/>
                 </a:solidFill>
-                <a:latin typeface="Arial"/>
-              </a:defRPr>
-            </a:pPr>
-            <a:r>
-              <a:t>• Direct Wireless Link:</a:t>
+                <a:latin typeface="Calibri"/>
+              </a:defRPr>
+            </a:pPr>
+            <a:r>
+              <a:t>ESP-NOW Direct Communication Link</a:t>
             </a:r>
           </a:p>
           <a:p>
@@ -4265,15 +5470,15 @@
               <a:spcAft>
                 <a:spcPts val="800"/>
               </a:spcAft>
-              <a:defRPr sz="1600">
-                <a:solidFill>
-                  <a:srgbClr val="505050"/>
-                </a:solidFill>
-                <a:latin typeface="Arial"/>
-              </a:defRPr>
-            </a:pPr>
-            <a:r>
-              <a:t>  Transmits orientation packages wirelessly via connectionless ESP-NOW protocol at 2.4 GHz.</a:t>
+              <a:defRPr sz="1250">
+                <a:solidFill>
+                  <a:srgbClr val="3C3C3C"/>
+                </a:solidFill>
+                <a:latin typeface="Calibri"/>
+              </a:defRPr>
+            </a:pPr>
+            <a:r>
+              <a:t>Broadcasts structured packets over the 2.4 GHz band directly to the receiver's physical MAC address, minimizing delay.</a:t>
             </a:r>
           </a:p>
           <a:p>
@@ -4281,15 +5486,15 @@
               <a:spcBef>
                 <a:spcPts val="1200"/>
               </a:spcBef>
-              <a:defRPr sz="1600" b="1">
+              <a:defRPr sz="1500" b="1">
                 <a:solidFill>
                   <a:srgbClr val="000000"/>
                 </a:solidFill>
-                <a:latin typeface="Arial"/>
-              </a:defRPr>
-            </a:pPr>
-            <a:r>
-              <a:t>• Receiver Mobile Chassis:</a:t>
+                <a:latin typeface="Calibri"/>
+              </a:defRPr>
+            </a:pPr>
+            <a:r>
+              <a:t>Receiver Mobile Chassis</a:t>
             </a:r>
           </a:p>
           <a:p>
@@ -4297,22 +5502,22 @@
               <a:spcAft>
                 <a:spcPts val="800"/>
               </a:spcAft>
-              <a:defRPr sz="1600">
-                <a:solidFill>
-                  <a:srgbClr val="505050"/>
-                </a:solidFill>
-                <a:latin typeface="Arial"/>
-              </a:defRPr>
-            </a:pPr>
-            <a:r>
-              <a:t>  Decodes the incoming commands and regulates motor speed and direction using dual L298N motor drivers.</a:t>
+              <a:defRPr sz="1250">
+                <a:solidFill>
+                  <a:srgbClr val="3C3C3C"/>
+                </a:solidFill>
+                <a:latin typeface="Calibri"/>
+              </a:defRPr>
+            </a:pPr>
+            <a:r>
+              <a:t>Decodes structural packets and drives dual L298N H-Bridge motor drivers to regulate the speed and direction of all four wheels.</a:t>
             </a:r>
           </a:p>
         </p:txBody>
       </p:sp>
       <p:pic>
         <p:nvPicPr>
-          <p:cNvPr id="4" name="Picture 3" descr="block-diagram.png"/>
+          <p:cNvPr id="8" name="Picture 7" descr="block-diagram.png"/>
           <p:cNvPicPr>
             <a:picLocks noChangeAspect="1"/>
           </p:cNvPicPr>
@@ -4327,11 +5532,16 @@
         <p:spPr>
           <a:xfrm>
             <a:off x="6217920" y="1645920"/>
-            <a:ext cx="5212080" cy="4114800"/>
+            <a:ext cx="5029200" cy="4023360"/>
           </a:xfrm>
           <a:prstGeom prst="rect">
             <a:avLst/>
           </a:prstGeom>
+          <a:ln w="12700">
+            <a:solidFill>
+              <a:srgbClr val="DCDCDC"/>
+            </a:solidFill>
+          </a:ln>
         </p:spPr>
       </p:pic>
     </p:spTree>
@@ -4360,7 +5570,7 @@
         </p:nvSpPr>
         <p:spPr>
           <a:xfrm>
-            <a:off x="731520" y="457200"/>
+            <a:off x="731520" y="365760"/>
             <a:ext cx="10728655" cy="731520"/>
           </a:xfrm>
           <a:prstGeom prst="rect">
@@ -4369,17 +5579,17 @@
           <a:noFill/>
         </p:spPr>
         <p:txBody>
-          <a:bodyPr wrap="square">
+          <a:bodyPr wrap="square" lIns="0" tIns="0" rIns="0" bIns="0">
             <a:spAutoFit/>
           </a:bodyPr>
           <a:lstStyle/>
           <a:p>
             <a:pPr>
-              <a:defRPr sz="3600" b="1">
+              <a:defRPr sz="3200" b="1">
                 <a:solidFill>
                   <a:srgbClr val="000000"/>
                 </a:solidFill>
-                <a:latin typeface="Arial"/>
+                <a:latin typeface="Calibri"/>
               </a:defRPr>
             </a:pPr>
             <a:r>
@@ -4390,14 +5600,104 @@
       </p:sp>
       <p:sp>
         <p:nvSpPr>
-          <p:cNvPr id="3" name="TextBox 2"/>
+          <p:cNvPr id="3" name="Rectangle 2"/>
+          <p:cNvSpPr/>
+          <p:nvPr/>
+        </p:nvSpPr>
+        <p:spPr>
+          <a:xfrm>
+            <a:off x="731520" y="1097280"/>
+            <a:ext cx="10728655" cy="13716"/>
+          </a:xfrm>
+          <a:prstGeom prst="rect">
+            <a:avLst/>
+          </a:prstGeom>
+          <a:solidFill>
+            <a:srgbClr val="000000"/>
+          </a:solidFill>
+          <a:ln>
+            <a:solidFill>
+              <a:srgbClr val="000000"/>
+            </a:solidFill>
+          </a:ln>
+        </p:spPr>
+        <p:style>
+          <a:lnRef idx="1">
+            <a:schemeClr val="accent1"/>
+          </a:lnRef>
+          <a:fillRef idx="3">
+            <a:schemeClr val="accent1"/>
+          </a:fillRef>
+          <a:effectRef idx="2">
+            <a:schemeClr val="accent1"/>
+          </a:effectRef>
+          <a:fontRef idx="minor">
+            <a:schemeClr val="lt1"/>
+          </a:fontRef>
+        </p:style>
+        <p:txBody>
+          <a:bodyPr rtlCol="0" anchor="ctr"/>
+          <a:lstStyle/>
+          <a:p>
+            <a:pPr algn="ctr"/>
+          </a:p>
+        </p:txBody>
+      </p:sp>
+      <p:sp>
+        <p:nvSpPr>
+          <p:cNvPr id="4" name="Rectangle 3"/>
+          <p:cNvSpPr/>
+          <p:nvPr/>
+        </p:nvSpPr>
+        <p:spPr>
+          <a:xfrm>
+            <a:off x="731520" y="6126480"/>
+            <a:ext cx="10728655" cy="9144"/>
+          </a:xfrm>
+          <a:prstGeom prst="rect">
+            <a:avLst/>
+          </a:prstGeom>
+          <a:solidFill>
+            <a:srgbClr val="DCDCDC"/>
+          </a:solidFill>
+          <a:ln>
+            <a:solidFill>
+              <a:srgbClr val="DCDCDC"/>
+            </a:solidFill>
+          </a:ln>
+        </p:spPr>
+        <p:style>
+          <a:lnRef idx="1">
+            <a:schemeClr val="accent1"/>
+          </a:lnRef>
+          <a:fillRef idx="3">
+            <a:schemeClr val="accent1"/>
+          </a:fillRef>
+          <a:effectRef idx="2">
+            <a:schemeClr val="accent1"/>
+          </a:effectRef>
+          <a:fontRef idx="minor">
+            <a:schemeClr val="lt1"/>
+          </a:fontRef>
+        </p:style>
+        <p:txBody>
+          <a:bodyPr rtlCol="0" anchor="ctr"/>
+          <a:lstStyle/>
+          <a:p>
+            <a:pPr algn="ctr"/>
+          </a:p>
+        </p:txBody>
+      </p:sp>
+      <p:sp>
+        <p:nvSpPr>
+          <p:cNvPr id="5" name="TextBox 4"/>
           <p:cNvSpPr txBox="1"/>
           <p:nvPr/>
         </p:nvSpPr>
         <p:spPr>
           <a:xfrm>
-            <a:off x="731520" y="1645920"/>
-            <a:ext cx="5029200" cy="4572000"/>
+            <a:off x="731520" y="6217920"/>
+            <a:ext cx="8229600" cy="365760"/>
           </a:xfrm>
           <a:prstGeom prst="rect">
             <a:avLst/>
@@ -4405,6 +5705,78 @@
           <a:noFill/>
         </p:spPr>
         <p:txBody>
+          <a:bodyPr wrap="square" lIns="0" tIns="0" rIns="0" bIns="0">
+            <a:spAutoFit/>
+          </a:bodyPr>
+          <a:lstStyle/>
+          <a:p>
+            <a:pPr>
+              <a:defRPr sz="900">
+                <a:solidFill>
+                  <a:srgbClr val="787878"/>
+                </a:solidFill>
+                <a:latin typeface="Calibri"/>
+              </a:defRPr>
+            </a:pPr>
+            <a:r>
+              <a:t>GESTURE CONTROLLED WIRELESS 4WD ROBOTIC CAR  |  MINI-PROJECT REPORT</a:t>
+            </a:r>
+          </a:p>
+        </p:txBody>
+      </p:sp>
+      <p:sp>
+        <p:nvSpPr>
+          <p:cNvPr id="6" name="TextBox 5"/>
+          <p:cNvSpPr txBox="1"/>
+          <p:nvPr/>
+        </p:nvSpPr>
+        <p:spPr>
+          <a:xfrm>
+            <a:off x="10058400" y="6217920"/>
+            <a:ext cx="1371600" cy="365760"/>
+          </a:xfrm>
+          <a:prstGeom prst="rect">
+            <a:avLst/>
+          </a:prstGeom>
+          <a:noFill/>
+        </p:spPr>
+        <p:txBody>
+          <a:bodyPr wrap="square" lIns="0" tIns="0" rIns="0" bIns="0">
+            <a:spAutoFit/>
+          </a:bodyPr>
+          <a:lstStyle/>
+          <a:p>
+            <a:pPr algn="r">
+              <a:defRPr sz="900" b="1">
+                <a:solidFill>
+                  <a:srgbClr val="787878"/>
+                </a:solidFill>
+                <a:latin typeface="Calibri"/>
+              </a:defRPr>
+            </a:pPr>
+            <a:r>
+              <a:t>Slide 4 of 12</a:t>
+            </a:r>
+          </a:p>
+        </p:txBody>
+      </p:sp>
+      <p:sp>
+        <p:nvSpPr>
+          <p:cNvPr id="7" name="TextBox 6"/>
+          <p:cNvSpPr txBox="1"/>
+          <p:nvPr/>
+        </p:nvSpPr>
+        <p:spPr>
+          <a:xfrm>
+            <a:off x="914400" y="1645920"/>
+            <a:ext cx="4754880" cy="4114800"/>
+          </a:xfrm>
+          <a:prstGeom prst="rect">
+            <a:avLst/>
+          </a:prstGeom>
+          <a:noFill/>
+        </p:spPr>
+        <p:txBody>
           <a:bodyPr wrap="square">
             <a:spAutoFit/>
           </a:bodyPr>
@@ -4414,15 +5786,15 @@
               <a:spcBef>
                 <a:spcPts val="1200"/>
               </a:spcBef>
-              <a:defRPr sz="1600" b="1">
+              <a:defRPr sz="1500" b="1">
                 <a:solidFill>
                   <a:srgbClr val="000000"/>
                 </a:solidFill>
-                <a:latin typeface="Arial"/>
-              </a:defRPr>
-            </a:pPr>
-            <a:r>
-              <a:t>• ESP32 Dev Board (Transmitter):</a:t>
+                <a:latin typeface="Calibri"/>
+              </a:defRPr>
+            </a:pPr>
+            <a:r>
+              <a:t>ESP32 Development Board</a:t>
             </a:r>
           </a:p>
           <a:p>
@@ -4430,15 +5802,15 @@
               <a:spcAft>
                 <a:spcPts val="800"/>
               </a:spcAft>
-              <a:defRPr sz="1600">
-                <a:solidFill>
-                  <a:srgbClr val="505050"/>
-                </a:solidFill>
-                <a:latin typeface="Arial"/>
-              </a:defRPr>
-            </a:pPr>
-            <a:r>
-              <a:t>  32-bit dual-core processor running at 240 MHz. Reads sensor data and packages wireless commands.</a:t>
+              <a:defRPr sz="1250">
+                <a:solidFill>
+                  <a:srgbClr val="3C3C3C"/>
+                </a:solidFill>
+                <a:latin typeface="Calibri"/>
+              </a:defRPr>
+            </a:pPr>
+            <a:r>
+              <a:t>Features a 32-bit dual-core processor running at 240 MHz. Handles sensor initialization, complementary filtering, and ESP-NOW broadcasts.</a:t>
             </a:r>
           </a:p>
           <a:p>
@@ -4446,15 +5818,15 @@
               <a:spcBef>
                 <a:spcPts val="1200"/>
               </a:spcBef>
-              <a:defRPr sz="1600" b="1">
+              <a:defRPr sz="1500" b="1">
                 <a:solidFill>
                   <a:srgbClr val="000000"/>
                 </a:solidFill>
-                <a:latin typeface="Arial"/>
-              </a:defRPr>
-            </a:pPr>
-            <a:r>
-              <a:t>• MPU6050 6-Axis Motion Sensor:</a:t>
+                <a:latin typeface="Calibri"/>
+              </a:defRPr>
+            </a:pPr>
+            <a:r>
+              <a:t>MPU6050 6-Axis Motion Sensor</a:t>
             </a:r>
           </a:p>
           <a:p>
@@ -4462,15 +5834,15 @@
               <a:spcAft>
                 <a:spcPts val="800"/>
               </a:spcAft>
-              <a:defRPr sz="1600">
-                <a:solidFill>
-                  <a:srgbClr val="505050"/>
-                </a:solidFill>
-                <a:latin typeface="Arial"/>
-              </a:defRPr>
-            </a:pPr>
-            <a:r>
-              <a:t>  Combines a 3-axis accelerometer and a 3-axis gyroscope on a single silicon die. Measures gravitational tilt.</a:t>
+              <a:defRPr sz="1250">
+                <a:solidFill>
+                  <a:srgbClr val="3C3C3C"/>
+                </a:solidFill>
+                <a:latin typeface="Calibri"/>
+              </a:defRPr>
+            </a:pPr>
+            <a:r>
+              <a:t>Combines a 3-axis accelerometer and a 3-axis gyroscope on a single silicon die. Transmits orientation vectors over the hardware I2C bus.</a:t>
             </a:r>
           </a:p>
           <a:p>
@@ -4478,15 +5850,15 @@
               <a:spcBef>
                 <a:spcPts val="1200"/>
               </a:spcBef>
-              <a:defRPr sz="1600" b="1">
+              <a:defRPr sz="1500" b="1">
                 <a:solidFill>
                   <a:srgbClr val="000000"/>
                 </a:solidFill>
-                <a:latin typeface="Arial"/>
-              </a:defRPr>
-            </a:pPr>
-            <a:r>
-              <a:t>• I2C Serial Interface:</a:t>
+                <a:latin typeface="Calibri"/>
+              </a:defRPr>
+            </a:pPr>
+            <a:r>
+              <a:t>Physical Interface Connections</a:t>
             </a:r>
           </a:p>
           <a:p>
@@ -4494,22 +5866,22 @@
               <a:spcAft>
                 <a:spcPts val="800"/>
               </a:spcAft>
-              <a:defRPr sz="1600">
-                <a:solidFill>
-                  <a:srgbClr val="505050"/>
-                </a:solidFill>
-                <a:latin typeface="Arial"/>
-              </a:defRPr>
-            </a:pPr>
-            <a:r>
-              <a:t>  Communicates over the I2C bus: SDA connected to GPIO 21, SCL connected to GPIO 22.</a:t>
+              <a:defRPr sz="1250">
+                <a:solidFill>
+                  <a:srgbClr val="3C3C3C"/>
+                </a:solidFill>
+                <a:latin typeface="Calibri"/>
+              </a:defRPr>
+            </a:pPr>
+            <a:r>
+              <a:t>Operates at 3.3V. SCL is mapped to GPIO 22 and SDA is mapped to GPIO 21 on the transmitter board.</a:t>
             </a:r>
           </a:p>
         </p:txBody>
       </p:sp>
       <p:pic>
         <p:nvPicPr>
-          <p:cNvPr id="4" name="Picture 3" descr="comp-img1.jpeg"/>
+          <p:cNvPr id="8" name="Picture 7" descr="comp-img1.jpeg"/>
           <p:cNvPicPr>
             <a:picLocks noChangeAspect="1"/>
           </p:cNvPicPr>
@@ -4524,11 +5896,16 @@
         <p:spPr>
           <a:xfrm>
             <a:off x="6217920" y="1645920"/>
-            <a:ext cx="5212080" cy="4114800"/>
+            <a:ext cx="5029200" cy="4023360"/>
           </a:xfrm>
           <a:prstGeom prst="rect">
             <a:avLst/>
           </a:prstGeom>
+          <a:ln w="12700">
+            <a:solidFill>
+              <a:srgbClr val="DCDCDC"/>
+            </a:solidFill>
+          </a:ln>
         </p:spPr>
       </p:pic>
     </p:spTree>
@@ -4557,7 +5934,7 @@
         </p:nvSpPr>
         <p:spPr>
           <a:xfrm>
-            <a:off x="731520" y="457200"/>
+            <a:off x="731520" y="365760"/>
             <a:ext cx="10728655" cy="731520"/>
           </a:xfrm>
           <a:prstGeom prst="rect">
@@ -4566,17 +5943,17 @@
           <a:noFill/>
         </p:spPr>
         <p:txBody>
-          <a:bodyPr wrap="square">
+          <a:bodyPr wrap="square" lIns="0" tIns="0" rIns="0" bIns="0">
             <a:spAutoFit/>
           </a:bodyPr>
           <a:lstStyle/>
           <a:p>
             <a:pPr>
-              <a:defRPr sz="3600" b="1">
+              <a:defRPr sz="3200" b="1">
                 <a:solidFill>
                   <a:srgbClr val="000000"/>
                 </a:solidFill>
-                <a:latin typeface="Arial"/>
+                <a:latin typeface="Calibri"/>
               </a:defRPr>
             </a:pPr>
             <a:r>
@@ -4587,14 +5964,104 @@
       </p:sp>
       <p:sp>
         <p:nvSpPr>
-          <p:cNvPr id="3" name="TextBox 2"/>
+          <p:cNvPr id="3" name="Rectangle 2"/>
+          <p:cNvSpPr/>
+          <p:nvPr/>
+        </p:nvSpPr>
+        <p:spPr>
+          <a:xfrm>
+            <a:off x="731520" y="1097280"/>
+            <a:ext cx="10728655" cy="13716"/>
+          </a:xfrm>
+          <a:prstGeom prst="rect">
+            <a:avLst/>
+          </a:prstGeom>
+          <a:solidFill>
+            <a:srgbClr val="000000"/>
+          </a:solidFill>
+          <a:ln>
+            <a:solidFill>
+              <a:srgbClr val="000000"/>
+            </a:solidFill>
+          </a:ln>
+        </p:spPr>
+        <p:style>
+          <a:lnRef idx="1">
+            <a:schemeClr val="accent1"/>
+          </a:lnRef>
+          <a:fillRef idx="3">
+            <a:schemeClr val="accent1"/>
+          </a:fillRef>
+          <a:effectRef idx="2">
+            <a:schemeClr val="accent1"/>
+          </a:effectRef>
+          <a:fontRef idx="minor">
+            <a:schemeClr val="lt1"/>
+          </a:fontRef>
+        </p:style>
+        <p:txBody>
+          <a:bodyPr rtlCol="0" anchor="ctr"/>
+          <a:lstStyle/>
+          <a:p>
+            <a:pPr algn="ctr"/>
+          </a:p>
+        </p:txBody>
+      </p:sp>
+      <p:sp>
+        <p:nvSpPr>
+          <p:cNvPr id="4" name="Rectangle 3"/>
+          <p:cNvSpPr/>
+          <p:nvPr/>
+        </p:nvSpPr>
+        <p:spPr>
+          <a:xfrm>
+            <a:off x="731520" y="6126480"/>
+            <a:ext cx="10728655" cy="9144"/>
+          </a:xfrm>
+          <a:prstGeom prst="rect">
+            <a:avLst/>
+          </a:prstGeom>
+          <a:solidFill>
+            <a:srgbClr val="DCDCDC"/>
+          </a:solidFill>
+          <a:ln>
+            <a:solidFill>
+              <a:srgbClr val="DCDCDC"/>
+            </a:solidFill>
+          </a:ln>
+        </p:spPr>
+        <p:style>
+          <a:lnRef idx="1">
+            <a:schemeClr val="accent1"/>
+          </a:lnRef>
+          <a:fillRef idx="3">
+            <a:schemeClr val="accent1"/>
+          </a:fillRef>
+          <a:effectRef idx="2">
+            <a:schemeClr val="accent1"/>
+          </a:effectRef>
+          <a:fontRef idx="minor">
+            <a:schemeClr val="lt1"/>
+          </a:fontRef>
+        </p:style>
+        <p:txBody>
+          <a:bodyPr rtlCol="0" anchor="ctr"/>
+          <a:lstStyle/>
+          <a:p>
+            <a:pPr algn="ctr"/>
+          </a:p>
+        </p:txBody>
+      </p:sp>
+      <p:sp>
+        <p:nvSpPr>
+          <p:cNvPr id="5" name="TextBox 4"/>
           <p:cNvSpPr txBox="1"/>
           <p:nvPr/>
         </p:nvSpPr>
         <p:spPr>
           <a:xfrm>
-            <a:off x="731520" y="1645920"/>
-            <a:ext cx="5029200" cy="4572000"/>
+            <a:off x="731520" y="6217920"/>
+            <a:ext cx="8229600" cy="365760"/>
           </a:xfrm>
           <a:prstGeom prst="rect">
             <a:avLst/>
@@ -4602,6 +6069,78 @@
           <a:noFill/>
         </p:spPr>
         <p:txBody>
+          <a:bodyPr wrap="square" lIns="0" tIns="0" rIns="0" bIns="0">
+            <a:spAutoFit/>
+          </a:bodyPr>
+          <a:lstStyle/>
+          <a:p>
+            <a:pPr>
+              <a:defRPr sz="900">
+                <a:solidFill>
+                  <a:srgbClr val="787878"/>
+                </a:solidFill>
+                <a:latin typeface="Calibri"/>
+              </a:defRPr>
+            </a:pPr>
+            <a:r>
+              <a:t>GESTURE CONTROLLED WIRELESS 4WD ROBOTIC CAR  |  MINI-PROJECT REPORT</a:t>
+            </a:r>
+          </a:p>
+        </p:txBody>
+      </p:sp>
+      <p:sp>
+        <p:nvSpPr>
+          <p:cNvPr id="6" name="TextBox 5"/>
+          <p:cNvSpPr txBox="1"/>
+          <p:nvPr/>
+        </p:nvSpPr>
+        <p:spPr>
+          <a:xfrm>
+            <a:off x="10058400" y="6217920"/>
+            <a:ext cx="1371600" cy="365760"/>
+          </a:xfrm>
+          <a:prstGeom prst="rect">
+            <a:avLst/>
+          </a:prstGeom>
+          <a:noFill/>
+        </p:spPr>
+        <p:txBody>
+          <a:bodyPr wrap="square" lIns="0" tIns="0" rIns="0" bIns="0">
+            <a:spAutoFit/>
+          </a:bodyPr>
+          <a:lstStyle/>
+          <a:p>
+            <a:pPr algn="r">
+              <a:defRPr sz="900" b="1">
+                <a:solidFill>
+                  <a:srgbClr val="787878"/>
+                </a:solidFill>
+                <a:latin typeface="Calibri"/>
+              </a:defRPr>
+            </a:pPr>
+            <a:r>
+              <a:t>Slide 5 of 12</a:t>
+            </a:r>
+          </a:p>
+        </p:txBody>
+      </p:sp>
+      <p:sp>
+        <p:nvSpPr>
+          <p:cNvPr id="7" name="TextBox 6"/>
+          <p:cNvSpPr txBox="1"/>
+          <p:nvPr/>
+        </p:nvSpPr>
+        <p:spPr>
+          <a:xfrm>
+            <a:off x="914400" y="1645920"/>
+            <a:ext cx="4754880" cy="4114800"/>
+          </a:xfrm>
+          <a:prstGeom prst="rect">
+            <a:avLst/>
+          </a:prstGeom>
+          <a:noFill/>
+        </p:spPr>
+        <p:txBody>
           <a:bodyPr wrap="square">
             <a:spAutoFit/>
           </a:bodyPr>
@@ -4611,15 +6150,15 @@
               <a:spcBef>
                 <a:spcPts val="1200"/>
               </a:spcBef>
-              <a:defRPr sz="1600" b="1">
+              <a:defRPr sz="1500" b="1">
                 <a:solidFill>
                   <a:srgbClr val="000000"/>
                 </a:solidFill>
-                <a:latin typeface="Arial"/>
-              </a:defRPr>
-            </a:pPr>
-            <a:r>
-              <a:t>• ESP32 Dev Board (Receiver):</a:t>
+                <a:latin typeface="Calibri"/>
+              </a:defRPr>
+            </a:pPr>
+            <a:r>
+              <a:t>ESP32 Receiver Board</a:t>
             </a:r>
           </a:p>
           <a:p>
@@ -4627,15 +6166,15 @@
               <a:spcAft>
                 <a:spcPts val="800"/>
               </a:spcAft>
-              <a:defRPr sz="1600">
-                <a:solidFill>
-                  <a:srgbClr val="505050"/>
-                </a:solidFill>
-                <a:latin typeface="Arial"/>
-              </a:defRPr>
-            </a:pPr>
-            <a:r>
-              <a:t>  Receives ESP-NOW packet payloads, triggers callback routines, and generates PWM/digital logic.</a:t>
+              <a:defRPr sz="1250">
+                <a:solidFill>
+                  <a:srgbClr val="3C3C3C"/>
+                </a:solidFill>
+                <a:latin typeface="Calibri"/>
+              </a:defRPr>
+            </a:pPr>
+            <a:r>
+              <a:t>Runs a dedicated ESP-NOW receiver callback routine. Decodes incoming packets and outputs logic commands and PWM values.</a:t>
             </a:r>
           </a:p>
           <a:p>
@@ -4643,15 +6182,15 @@
               <a:spcBef>
                 <a:spcPts val="1200"/>
               </a:spcBef>
-              <a:defRPr sz="1600" b="1">
+              <a:defRPr sz="1500" b="1">
                 <a:solidFill>
                   <a:srgbClr val="000000"/>
                 </a:solidFill>
-                <a:latin typeface="Arial"/>
-              </a:defRPr>
-            </a:pPr>
-            <a:r>
-              <a:t>• Dual L298N H-Bridge Drivers:</a:t>
+                <a:latin typeface="Calibri"/>
+              </a:defRPr>
+            </a:pPr>
+            <a:r>
+              <a:t>Dual L298N H-Bridge Drivers</a:t>
             </a:r>
           </a:p>
           <a:p>
@@ -4659,15 +6198,15 @@
               <a:spcAft>
                 <a:spcPts val="800"/>
               </a:spcAft>
-              <a:defRPr sz="1600">
-                <a:solidFill>
-                  <a:srgbClr val="505050"/>
-                </a:solidFill>
-                <a:latin typeface="Arial"/>
-              </a:defRPr>
-            </a:pPr>
-            <a:r>
-              <a:t>  Provides current amplification (up to 2A per channel) and independent speed/direction control to all 4 motors.</a:t>
+              <a:defRPr sz="1250">
+                <a:solidFill>
+                  <a:srgbClr val="3C3C3C"/>
+                </a:solidFill>
+                <a:latin typeface="Calibri"/>
+              </a:defRPr>
+            </a:pPr>
+            <a:r>
+              <a:t>Split into Front and Back configurations. Handles up to 2A per channel to power the motors without overloading the microcontrollers.</a:t>
             </a:r>
           </a:p>
           <a:p>
@@ -4675,15 +6214,15 @@
               <a:spcBef>
                 <a:spcPts val="1200"/>
               </a:spcBef>
-              <a:defRPr sz="1600" b="1">
+              <a:defRPr sz="1500" b="1">
                 <a:solidFill>
                   <a:srgbClr val="000000"/>
                 </a:solidFill>
-                <a:latin typeface="Arial"/>
-              </a:defRPr>
-            </a:pPr>
-            <a:r>
-              <a:t>• Actuators &amp; Power Pack:</a:t>
+                <a:latin typeface="Calibri"/>
+              </a:defRPr>
+            </a:pPr>
+            <a:r>
+              <a:t>Actuators &amp; 7.4V Power Supply</a:t>
             </a:r>
           </a:p>
           <a:p>
@@ -4691,22 +6230,22 @@
               <a:spcAft>
                 <a:spcPts val="800"/>
               </a:spcAft>
-              <a:defRPr sz="1600">
-                <a:solidFill>
-                  <a:srgbClr val="505050"/>
-                </a:solidFill>
-                <a:latin typeface="Arial"/>
-              </a:defRPr>
-            </a:pPr>
-            <a:r>
-              <a:t>  Four 200 RPM dual shaft BO geared motors powered by a high-capacity 7.4V series 18650 Li-Ion battery pack.</a:t>
+              <a:defRPr sz="1250">
+                <a:solidFill>
+                  <a:srgbClr val="3C3C3C"/>
+                </a:solidFill>
+                <a:latin typeface="Calibri"/>
+              </a:defRPr>
+            </a:pPr>
+            <a:r>
+              <a:t>Four 200 RPM dual shaft BO geared motors provide optimal torque, driven by two series-wired 18650 Lithium-Ion batteries.</a:t>
             </a:r>
           </a:p>
         </p:txBody>
       </p:sp>
       <p:pic>
         <p:nvPicPr>
-          <p:cNvPr id="4" name="Picture 3" descr="comp-img2.jpeg"/>
+          <p:cNvPr id="8" name="Picture 7" descr="comp-img2.jpeg"/>
           <p:cNvPicPr>
             <a:picLocks noChangeAspect="1"/>
           </p:cNvPicPr>
@@ -4721,11 +6260,16 @@
         <p:spPr>
           <a:xfrm>
             <a:off x="6217920" y="1645920"/>
-            <a:ext cx="5212080" cy="4114800"/>
+            <a:ext cx="5029200" cy="4023360"/>
           </a:xfrm>
           <a:prstGeom prst="rect">
             <a:avLst/>
           </a:prstGeom>
+          <a:ln w="12700">
+            <a:solidFill>
+              <a:srgbClr val="DCDCDC"/>
+            </a:solidFill>
+          </a:ln>
         </p:spPr>
       </p:pic>
     </p:spTree>
@@ -4754,7 +6298,7 @@
         </p:nvSpPr>
         <p:spPr>
           <a:xfrm>
-            <a:off x="731520" y="457200"/>
+            <a:off x="731520" y="365760"/>
             <a:ext cx="10728655" cy="731520"/>
           </a:xfrm>
           <a:prstGeom prst="rect">
@@ -4763,17 +6307,17 @@
           <a:noFill/>
         </p:spPr>
         <p:txBody>
-          <a:bodyPr wrap="square">
+          <a:bodyPr wrap="square" lIns="0" tIns="0" rIns="0" bIns="0">
             <a:spAutoFit/>
           </a:bodyPr>
           <a:lstStyle/>
           <a:p>
             <a:pPr>
-              <a:defRPr sz="3600" b="1">
+              <a:defRPr sz="3200" b="1">
                 <a:solidFill>
                   <a:srgbClr val="000000"/>
                 </a:solidFill>
-                <a:latin typeface="Arial"/>
+                <a:latin typeface="Calibri"/>
               </a:defRPr>
             </a:pPr>
             <a:r>
@@ -4784,14 +6328,104 @@
       </p:sp>
       <p:sp>
         <p:nvSpPr>
-          <p:cNvPr id="3" name="TextBox 2"/>
+          <p:cNvPr id="3" name="Rectangle 2"/>
+          <p:cNvSpPr/>
+          <p:nvPr/>
+        </p:nvSpPr>
+        <p:spPr>
+          <a:xfrm>
+            <a:off x="731520" y="1097280"/>
+            <a:ext cx="10728655" cy="13716"/>
+          </a:xfrm>
+          <a:prstGeom prst="rect">
+            <a:avLst/>
+          </a:prstGeom>
+          <a:solidFill>
+            <a:srgbClr val="000000"/>
+          </a:solidFill>
+          <a:ln>
+            <a:solidFill>
+              <a:srgbClr val="000000"/>
+            </a:solidFill>
+          </a:ln>
+        </p:spPr>
+        <p:style>
+          <a:lnRef idx="1">
+            <a:schemeClr val="accent1"/>
+          </a:lnRef>
+          <a:fillRef idx="3">
+            <a:schemeClr val="accent1"/>
+          </a:fillRef>
+          <a:effectRef idx="2">
+            <a:schemeClr val="accent1"/>
+          </a:effectRef>
+          <a:fontRef idx="minor">
+            <a:schemeClr val="lt1"/>
+          </a:fontRef>
+        </p:style>
+        <p:txBody>
+          <a:bodyPr rtlCol="0" anchor="ctr"/>
+          <a:lstStyle/>
+          <a:p>
+            <a:pPr algn="ctr"/>
+          </a:p>
+        </p:txBody>
+      </p:sp>
+      <p:sp>
+        <p:nvSpPr>
+          <p:cNvPr id="4" name="Rectangle 3"/>
+          <p:cNvSpPr/>
+          <p:nvPr/>
+        </p:nvSpPr>
+        <p:spPr>
+          <a:xfrm>
+            <a:off x="731520" y="6126480"/>
+            <a:ext cx="10728655" cy="9144"/>
+          </a:xfrm>
+          <a:prstGeom prst="rect">
+            <a:avLst/>
+          </a:prstGeom>
+          <a:solidFill>
+            <a:srgbClr val="DCDCDC"/>
+          </a:solidFill>
+          <a:ln>
+            <a:solidFill>
+              <a:srgbClr val="DCDCDC"/>
+            </a:solidFill>
+          </a:ln>
+        </p:spPr>
+        <p:style>
+          <a:lnRef idx="1">
+            <a:schemeClr val="accent1"/>
+          </a:lnRef>
+          <a:fillRef idx="3">
+            <a:schemeClr val="accent1"/>
+          </a:fillRef>
+          <a:effectRef idx="2">
+            <a:schemeClr val="accent1"/>
+          </a:effectRef>
+          <a:fontRef idx="minor">
+            <a:schemeClr val="lt1"/>
+          </a:fontRef>
+        </p:style>
+        <p:txBody>
+          <a:bodyPr rtlCol="0" anchor="ctr"/>
+          <a:lstStyle/>
+          <a:p>
+            <a:pPr algn="ctr"/>
+          </a:p>
+        </p:txBody>
+      </p:sp>
+      <p:sp>
+        <p:nvSpPr>
+          <p:cNvPr id="5" name="TextBox 4"/>
           <p:cNvSpPr txBox="1"/>
           <p:nvPr/>
         </p:nvSpPr>
         <p:spPr>
           <a:xfrm>
-            <a:off x="731520" y="1645920"/>
-            <a:ext cx="5029200" cy="4572000"/>
+            <a:off x="731520" y="6217920"/>
+            <a:ext cx="8229600" cy="365760"/>
           </a:xfrm>
           <a:prstGeom prst="rect">
             <a:avLst/>
@@ -4799,6 +6433,78 @@
           <a:noFill/>
         </p:spPr>
         <p:txBody>
+          <a:bodyPr wrap="square" lIns="0" tIns="0" rIns="0" bIns="0">
+            <a:spAutoFit/>
+          </a:bodyPr>
+          <a:lstStyle/>
+          <a:p>
+            <a:pPr>
+              <a:defRPr sz="900">
+                <a:solidFill>
+                  <a:srgbClr val="787878"/>
+                </a:solidFill>
+                <a:latin typeface="Calibri"/>
+              </a:defRPr>
+            </a:pPr>
+            <a:r>
+              <a:t>GESTURE CONTROLLED WIRELESS 4WD ROBOTIC CAR  |  MINI-PROJECT REPORT</a:t>
+            </a:r>
+          </a:p>
+        </p:txBody>
+      </p:sp>
+      <p:sp>
+        <p:nvSpPr>
+          <p:cNvPr id="6" name="TextBox 5"/>
+          <p:cNvSpPr txBox="1"/>
+          <p:nvPr/>
+        </p:nvSpPr>
+        <p:spPr>
+          <a:xfrm>
+            <a:off x="10058400" y="6217920"/>
+            <a:ext cx="1371600" cy="365760"/>
+          </a:xfrm>
+          <a:prstGeom prst="rect">
+            <a:avLst/>
+          </a:prstGeom>
+          <a:noFill/>
+        </p:spPr>
+        <p:txBody>
+          <a:bodyPr wrap="square" lIns="0" tIns="0" rIns="0" bIns="0">
+            <a:spAutoFit/>
+          </a:bodyPr>
+          <a:lstStyle/>
+          <a:p>
+            <a:pPr algn="r">
+              <a:defRPr sz="900" b="1">
+                <a:solidFill>
+                  <a:srgbClr val="787878"/>
+                </a:solidFill>
+                <a:latin typeface="Calibri"/>
+              </a:defRPr>
+            </a:pPr>
+            <a:r>
+              <a:t>Slide 6 of 12</a:t>
+            </a:r>
+          </a:p>
+        </p:txBody>
+      </p:sp>
+      <p:sp>
+        <p:nvSpPr>
+          <p:cNvPr id="7" name="TextBox 6"/>
+          <p:cNvSpPr txBox="1"/>
+          <p:nvPr/>
+        </p:nvSpPr>
+        <p:spPr>
+          <a:xfrm>
+            <a:off x="914400" y="1645920"/>
+            <a:ext cx="4754880" cy="4114800"/>
+          </a:xfrm>
+          <a:prstGeom prst="rect">
+            <a:avLst/>
+          </a:prstGeom>
+          <a:noFill/>
+        </p:spPr>
+        <p:txBody>
           <a:bodyPr wrap="square">
             <a:spAutoFit/>
           </a:bodyPr>
@@ -4808,15 +6514,15 @@
               <a:spcBef>
                 <a:spcPts val="1200"/>
               </a:spcBef>
-              <a:defRPr sz="1600" b="1">
+              <a:defRPr sz="1500" b="1">
                 <a:solidFill>
                   <a:srgbClr val="000000"/>
                 </a:solidFill>
-                <a:latin typeface="Arial"/>
-              </a:defRPr>
-            </a:pPr>
-            <a:r>
-              <a:t>• Direct Pin Assignments:</a:t>
+                <a:latin typeface="Calibri"/>
+              </a:defRPr>
+            </a:pPr>
+            <a:r>
+              <a:t>Direct GPIO Connection Mapping</a:t>
             </a:r>
           </a:p>
           <a:p>
@@ -4824,15 +6530,15 @@
               <a:spcAft>
                 <a:spcPts val="800"/>
               </a:spcAft>
-              <a:defRPr sz="1600">
-                <a:solidFill>
-                  <a:srgbClr val="505050"/>
-                </a:solidFill>
-                <a:latin typeface="Arial"/>
-              </a:defRPr>
-            </a:pPr>
-            <a:r>
-              <a:t>  Maintains independent inputs: ENA, IN1-IN4, and ENB for both Front and Back driver boards.</a:t>
+              <a:defRPr sz="1250">
+                <a:solidFill>
+                  <a:srgbClr val="3C3C3C"/>
+                </a:solidFill>
+                <a:latin typeface="Calibri"/>
+              </a:defRPr>
+            </a:pPr>
+            <a:r>
+              <a:t>Maintains dedicated pins (ENA, IN1-IN4, ENB) for both the Front and Back motor drivers to support independent wheel speed.</a:t>
             </a:r>
           </a:p>
           <a:p>
@@ -4840,15 +6546,15 @@
               <a:spcBef>
                 <a:spcPts val="1200"/>
               </a:spcBef>
-              <a:defRPr sz="1600" b="1">
+              <a:defRPr sz="1500" b="1">
                 <a:solidFill>
                   <a:srgbClr val="000000"/>
                 </a:solidFill>
-                <a:latin typeface="Arial"/>
-              </a:defRPr>
-            </a:pPr>
-            <a:r>
-              <a:t>• PWM Speed Control:</a:t>
+                <a:latin typeface="Calibri"/>
+              </a:defRPr>
+            </a:pPr>
+            <a:r>
+              <a:t>PWM Signal Modulation</a:t>
             </a:r>
           </a:p>
           <a:p>
@@ -4856,15 +6562,15 @@
               <a:spcAft>
                 <a:spcPts val="800"/>
               </a:spcAft>
-              <a:defRPr sz="1600">
-                <a:solidFill>
-                  <a:srgbClr val="505050"/>
-                </a:solidFill>
-                <a:latin typeface="Arial"/>
-              </a:defRPr>
-            </a:pPr>
-            <a:r>
-              <a:t>  ESP32 outputs analog-mapped PWM values (0-255) to the ENA/ENB enable pins to regulate motor speed.</a:t>
+              <a:defRPr sz="1250">
+                <a:solidFill>
+                  <a:srgbClr val="3C3C3C"/>
+                </a:solidFill>
+                <a:latin typeface="Calibri"/>
+              </a:defRPr>
+            </a:pPr>
+            <a:r>
+              <a:t>ESP32 outputs analog-mapped PWM speed controls (range 0-255) to L298N enable pins to smooth acceleration and cornering.</a:t>
             </a:r>
           </a:p>
           <a:p>
@@ -4872,15 +6578,15 @@
               <a:spcBef>
                 <a:spcPts val="1200"/>
               </a:spcBef>
-              <a:defRPr sz="1600" b="1">
+              <a:defRPr sz="1500" b="1">
                 <a:solidFill>
                   <a:srgbClr val="000000"/>
                 </a:solidFill>
-                <a:latin typeface="Arial"/>
-              </a:defRPr>
-            </a:pPr>
-            <a:r>
-              <a:t>• Common Ground System:</a:t>
+                <a:latin typeface="Calibri"/>
+              </a:defRPr>
+            </a:pPr>
+            <a:r>
+              <a:t>Isolated Power &amp; Common Ground</a:t>
             </a:r>
           </a:p>
           <a:p>
@@ -4888,22 +6594,22 @@
               <a:spcAft>
                 <a:spcPts val="800"/>
               </a:spcAft>
-              <a:defRPr sz="1600">
-                <a:solidFill>
-                  <a:srgbClr val="505050"/>
-                </a:solidFill>
-                <a:latin typeface="Arial"/>
-              </a:defRPr>
-            </a:pPr>
-            <a:r>
-              <a:t>  Requires tying the GND pins of the ESP32, battery pack, and driver boards together to establish a stable reference voltage.</a:t>
+              <a:defRPr sz="1250">
+                <a:solidFill>
+                  <a:srgbClr val="3C3C3C"/>
+                </a:solidFill>
+                <a:latin typeface="Calibri"/>
+              </a:defRPr>
+            </a:pPr>
+            <a:r>
+              <a:t>Tying all GND pins together establishes a common reference voltage, preventing motor back-EMF spikes from causing microcontroller resets.</a:t>
             </a:r>
           </a:p>
         </p:txBody>
       </p:sp>
       <p:pic>
         <p:nvPicPr>
-          <p:cNvPr id="4" name="Picture 3" descr="l298n_motordriver_pinout_bb.png"/>
+          <p:cNvPr id="8" name="Picture 7" descr="l298n_motordriver_pinout_bb.png"/>
           <p:cNvPicPr>
             <a:picLocks noChangeAspect="1"/>
           </p:cNvPicPr>
@@ -4918,11 +6624,16 @@
         <p:spPr>
           <a:xfrm>
             <a:off x="6217920" y="1645920"/>
-            <a:ext cx="5212080" cy="4114800"/>
+            <a:ext cx="5029200" cy="4023360"/>
           </a:xfrm>
           <a:prstGeom prst="rect">
             <a:avLst/>
           </a:prstGeom>
+          <a:ln w="12700">
+            <a:solidFill>
+              <a:srgbClr val="DCDCDC"/>
+            </a:solidFill>
+          </a:ln>
         </p:spPr>
       </p:pic>
     </p:spTree>
@@ -4951,7 +6662,7 @@
         </p:nvSpPr>
         <p:spPr>
           <a:xfrm>
-            <a:off x="731520" y="457200"/>
+            <a:off x="731520" y="365760"/>
             <a:ext cx="10728655" cy="731520"/>
           </a:xfrm>
           <a:prstGeom prst="rect">
@@ -4960,17 +6671,17 @@
           <a:noFill/>
         </p:spPr>
         <p:txBody>
-          <a:bodyPr wrap="square">
+          <a:bodyPr wrap="square" lIns="0" tIns="0" rIns="0" bIns="0">
             <a:spAutoFit/>
           </a:bodyPr>
           <a:lstStyle/>
           <a:p>
             <a:pPr>
-              <a:defRPr sz="3600" b="1">
+              <a:defRPr sz="3200" b="1">
                 <a:solidFill>
                   <a:srgbClr val="000000"/>
                 </a:solidFill>
-                <a:latin typeface="Arial"/>
+                <a:latin typeface="Calibri"/>
               </a:defRPr>
             </a:pPr>
             <a:r>
@@ -4981,14 +6692,104 @@
       </p:sp>
       <p:sp>
         <p:nvSpPr>
-          <p:cNvPr id="3" name="TextBox 2"/>
+          <p:cNvPr id="3" name="Rectangle 2"/>
+          <p:cNvSpPr/>
+          <p:nvPr/>
+        </p:nvSpPr>
+        <p:spPr>
+          <a:xfrm>
+            <a:off x="731520" y="1097280"/>
+            <a:ext cx="10728655" cy="13716"/>
+          </a:xfrm>
+          <a:prstGeom prst="rect">
+            <a:avLst/>
+          </a:prstGeom>
+          <a:solidFill>
+            <a:srgbClr val="000000"/>
+          </a:solidFill>
+          <a:ln>
+            <a:solidFill>
+              <a:srgbClr val="000000"/>
+            </a:solidFill>
+          </a:ln>
+        </p:spPr>
+        <p:style>
+          <a:lnRef idx="1">
+            <a:schemeClr val="accent1"/>
+          </a:lnRef>
+          <a:fillRef idx="3">
+            <a:schemeClr val="accent1"/>
+          </a:fillRef>
+          <a:effectRef idx="2">
+            <a:schemeClr val="accent1"/>
+          </a:effectRef>
+          <a:fontRef idx="minor">
+            <a:schemeClr val="lt1"/>
+          </a:fontRef>
+        </p:style>
+        <p:txBody>
+          <a:bodyPr rtlCol="0" anchor="ctr"/>
+          <a:lstStyle/>
+          <a:p>
+            <a:pPr algn="ctr"/>
+          </a:p>
+        </p:txBody>
+      </p:sp>
+      <p:sp>
+        <p:nvSpPr>
+          <p:cNvPr id="4" name="Rectangle 3"/>
+          <p:cNvSpPr/>
+          <p:nvPr/>
+        </p:nvSpPr>
+        <p:spPr>
+          <a:xfrm>
+            <a:off x="731520" y="6126480"/>
+            <a:ext cx="10728655" cy="9144"/>
+          </a:xfrm>
+          <a:prstGeom prst="rect">
+            <a:avLst/>
+          </a:prstGeom>
+          <a:solidFill>
+            <a:srgbClr val="DCDCDC"/>
+          </a:solidFill>
+          <a:ln>
+            <a:solidFill>
+              <a:srgbClr val="DCDCDC"/>
+            </a:solidFill>
+          </a:ln>
+        </p:spPr>
+        <p:style>
+          <a:lnRef idx="1">
+            <a:schemeClr val="accent1"/>
+          </a:lnRef>
+          <a:fillRef idx="3">
+            <a:schemeClr val="accent1"/>
+          </a:fillRef>
+          <a:effectRef idx="2">
+            <a:schemeClr val="accent1"/>
+          </a:effectRef>
+          <a:fontRef idx="minor">
+            <a:schemeClr val="lt1"/>
+          </a:fontRef>
+        </p:style>
+        <p:txBody>
+          <a:bodyPr rtlCol="0" anchor="ctr"/>
+          <a:lstStyle/>
+          <a:p>
+            <a:pPr algn="ctr"/>
+          </a:p>
+        </p:txBody>
+      </p:sp>
+      <p:sp>
+        <p:nvSpPr>
+          <p:cNvPr id="5" name="TextBox 4"/>
           <p:cNvSpPr txBox="1"/>
           <p:nvPr/>
         </p:nvSpPr>
         <p:spPr>
           <a:xfrm>
-            <a:off x="731520" y="1645920"/>
-            <a:ext cx="10728655" cy="4572000"/>
+            <a:off x="731520" y="6217920"/>
+            <a:ext cx="8229600" cy="365760"/>
           </a:xfrm>
           <a:prstGeom prst="rect">
             <a:avLst/>
@@ -4996,72 +6797,208 @@
           <a:noFill/>
         </p:spPr>
         <p:txBody>
+          <a:bodyPr wrap="square" lIns="0" tIns="0" rIns="0" bIns="0">
+            <a:spAutoFit/>
+          </a:bodyPr>
+          <a:lstStyle/>
+          <a:p>
+            <a:pPr>
+              <a:defRPr sz="900">
+                <a:solidFill>
+                  <a:srgbClr val="787878"/>
+                </a:solidFill>
+                <a:latin typeface="Calibri"/>
+              </a:defRPr>
+            </a:pPr>
+            <a:r>
+              <a:t>GESTURE CONTROLLED WIRELESS 4WD ROBOTIC CAR  |  MINI-PROJECT REPORT</a:t>
+            </a:r>
+          </a:p>
+        </p:txBody>
+      </p:sp>
+      <p:sp>
+        <p:nvSpPr>
+          <p:cNvPr id="6" name="TextBox 5"/>
+          <p:cNvSpPr txBox="1"/>
+          <p:nvPr/>
+        </p:nvSpPr>
+        <p:spPr>
+          <a:xfrm>
+            <a:off x="10058400" y="6217920"/>
+            <a:ext cx="1371600" cy="365760"/>
+          </a:xfrm>
+          <a:prstGeom prst="rect">
+            <a:avLst/>
+          </a:prstGeom>
+          <a:noFill/>
+        </p:spPr>
+        <p:txBody>
+          <a:bodyPr wrap="square" lIns="0" tIns="0" rIns="0" bIns="0">
+            <a:spAutoFit/>
+          </a:bodyPr>
+          <a:lstStyle/>
+          <a:p>
+            <a:pPr algn="r">
+              <a:defRPr sz="900" b="1">
+                <a:solidFill>
+                  <a:srgbClr val="787878"/>
+                </a:solidFill>
+                <a:latin typeface="Calibri"/>
+              </a:defRPr>
+            </a:pPr>
+            <a:r>
+              <a:t>Slide 7 of 12</a:t>
+            </a:r>
+          </a:p>
+        </p:txBody>
+      </p:sp>
+      <p:sp>
+        <p:nvSpPr>
+          <p:cNvPr id="7" name="TextBox 6"/>
+          <p:cNvSpPr txBox="1"/>
+          <p:nvPr/>
+        </p:nvSpPr>
+        <p:spPr>
+          <a:xfrm>
+            <a:off x="914400" y="1645920"/>
+            <a:ext cx="10332720" cy="4114800"/>
+          </a:xfrm>
+          <a:prstGeom prst="rect">
+            <a:avLst/>
+          </a:prstGeom>
+          <a:noFill/>
+        </p:spPr>
+        <p:txBody>
           <a:bodyPr wrap="square">
             <a:spAutoFit/>
           </a:bodyPr>
           <a:lstStyle/>
           <a:p>
             <a:pPr>
+              <a:spcBef>
+                <a:spcPts val="1200"/>
+              </a:spcBef>
+              <a:defRPr sz="1500" b="1">
+                <a:solidFill>
+                  <a:srgbClr val="000000"/>
+                </a:solidFill>
+                <a:latin typeface="Calibri"/>
+              </a:defRPr>
+            </a:pPr>
+            <a:r>
+              <a:t>Connectionless Packet Transfer</a:t>
+            </a:r>
+          </a:p>
+          <a:p>
+            <a:pPr>
               <a:spcAft>
-                <a:spcPts val="2400"/>
+                <a:spcPts val="800"/>
               </a:spcAft>
-              <a:defRPr sz="1800">
-                <a:solidFill>
-                  <a:srgbClr val="505050"/>
-                </a:solidFill>
-                <a:latin typeface="Arial"/>
-              </a:defRPr>
-            </a:pPr>
-            <a:r>
-              <a:t>• Connectionless Communication: Operates directly on the 2.4 GHz band. Bypasses the pairing, handshaking, and router routing overhead of standard Wi-Fi.</a:t>
+              <a:defRPr sz="1250">
+                <a:solidFill>
+                  <a:srgbClr val="3C3C3C"/>
+                </a:solidFill>
+                <a:latin typeface="Calibri"/>
+              </a:defRPr>
+            </a:pPr>
+            <a:r>
+              <a:t>Operates at 2.4 GHz, broadcasting command payloads directly without routing through a local wireless router.</a:t>
+            </a:r>
+          </a:p>
+          <a:p>
+            <a:pPr>
+              <a:spcBef>
+                <a:spcPts val="1200"/>
+              </a:spcBef>
+              <a:defRPr sz="1500" b="1">
+                <a:solidFill>
+                  <a:srgbClr val="000000"/>
+                </a:solidFill>
+                <a:latin typeface="Calibri"/>
+              </a:defRPr>
+            </a:pPr>
+            <a:r>
+              <a:t>Ultra-Low Latency Performance</a:t>
             </a:r>
           </a:p>
           <a:p>
             <a:pPr>
               <a:spcAft>
-                <a:spcPts val="2400"/>
+                <a:spcPts val="800"/>
               </a:spcAft>
-              <a:defRPr sz="1800">
-                <a:solidFill>
-                  <a:srgbClr val="505050"/>
-                </a:solidFill>
-                <a:latin typeface="Arial"/>
-              </a:defRPr>
-            </a:pPr>
-            <a:r>
-              <a:t>• Ultra-Low Latency: Minimizes command propagation delays to under 10 milliseconds, enabling instantaneous chassis response to hand gestures.</a:t>
+              <a:defRPr sz="1250">
+                <a:solidFill>
+                  <a:srgbClr val="3C3C3C"/>
+                </a:solidFill>
+                <a:latin typeface="Calibri"/>
+              </a:defRPr>
+            </a:pPr>
+            <a:r>
+              <a:t>Command transmission time is restricted to under 10 ms, ensuring instant reaction compared to standard Bluetooth or Wi-Fi pairings.</a:t>
+            </a:r>
+          </a:p>
+          <a:p>
+            <a:pPr>
+              <a:spcBef>
+                <a:spcPts val="1200"/>
+              </a:spcBef>
+              <a:defRPr sz="1500" b="1">
+                <a:solidFill>
+                  <a:srgbClr val="000000"/>
+                </a:solidFill>
+                <a:latin typeface="Calibri"/>
+              </a:defRPr>
+            </a:pPr>
+            <a:r>
+              <a:t>Unicast MAC Address Registration</a:t>
             </a:r>
           </a:p>
           <a:p>
             <a:pPr>
               <a:spcAft>
-                <a:spcPts val="2400"/>
+                <a:spcPts val="800"/>
               </a:spcAft>
-              <a:defRPr sz="1800">
-                <a:solidFill>
-                  <a:srgbClr val="505050"/>
-                </a:solidFill>
-                <a:latin typeface="Arial"/>
-              </a:defRPr>
-            </a:pPr>
-            <a:r>
-              <a:t>• Media Access Control (MAC) Address Pairing: Secure peer-to-peer unicast connection requires uploading a helper sketch to read the receiver's physical 48-bit MAC address.</a:t>
+              <a:defRPr sz="1250">
+                <a:solidFill>
+                  <a:srgbClr val="3C3C3C"/>
+                </a:solidFill>
+                <a:latin typeface="Calibri"/>
+              </a:defRPr>
+            </a:pPr>
+            <a:r>
+              <a:t>Secure peer-to-peer connection is established by programming the receiver ESP32's unique physical 48-bit MAC address into the transmitter.</a:t>
+            </a:r>
+          </a:p>
+          <a:p>
+            <a:pPr>
+              <a:spcBef>
+                <a:spcPts val="1200"/>
+              </a:spcBef>
+              <a:defRPr sz="1500" b="1">
+                <a:solidFill>
+                  <a:srgbClr val="000000"/>
+                </a:solidFill>
+                <a:latin typeface="Calibri"/>
+              </a:defRPr>
+            </a:pPr>
+            <a:r>
+              <a:t>Signal Reliability and Range</a:t>
             </a:r>
           </a:p>
           <a:p>
             <a:pPr>
               <a:spcAft>
-                <a:spcPts val="2400"/>
+                <a:spcPts val="800"/>
               </a:spcAft>
-              <a:defRPr sz="1800">
-                <a:solidFill>
-                  <a:srgbClr val="505050"/>
-                </a:solidFill>
-                <a:latin typeface="Arial"/>
-              </a:defRPr>
-            </a:pPr>
-            <a:r>
-              <a:t>• Transmission Range: Achieves a stable, noise-immune operational range of up to 45 meters under active line-of-sight test environments.</a:t>
+              <a:defRPr sz="1250">
+                <a:solidFill>
+                  <a:srgbClr val="3C3C3C"/>
+                </a:solidFill>
+                <a:latin typeface="Calibri"/>
+              </a:defRPr>
+            </a:pPr>
+            <a:r>
+              <a:t>Built-in CRC check and direct pairing deliver high noise immunity and a stable control range of up to 45 meters under line-of-sight conditions.</a:t>
             </a:r>
           </a:p>
         </p:txBody>
@@ -5092,7 +7029,7 @@
         </p:nvSpPr>
         <p:spPr>
           <a:xfrm>
-            <a:off x="731520" y="457200"/>
+            <a:off x="731520" y="365760"/>
             <a:ext cx="10728655" cy="731520"/>
           </a:xfrm>
           <a:prstGeom prst="rect">
@@ -5101,17 +7038,17 @@
           <a:noFill/>
         </p:spPr>
         <p:txBody>
-          <a:bodyPr wrap="square">
+          <a:bodyPr wrap="square" lIns="0" tIns="0" rIns="0" bIns="0">
             <a:spAutoFit/>
           </a:bodyPr>
           <a:lstStyle/>
           <a:p>
             <a:pPr>
-              <a:defRPr sz="3600" b="1">
+              <a:defRPr sz="3200" b="1">
                 <a:solidFill>
                   <a:srgbClr val="000000"/>
                 </a:solidFill>
-                <a:latin typeface="Arial"/>
+                <a:latin typeface="Calibri"/>
               </a:defRPr>
             </a:pPr>
             <a:r>
@@ -5122,14 +7059,104 @@
       </p:sp>
       <p:sp>
         <p:nvSpPr>
-          <p:cNvPr id="3" name="TextBox 2"/>
+          <p:cNvPr id="3" name="Rectangle 2"/>
+          <p:cNvSpPr/>
+          <p:nvPr/>
+        </p:nvSpPr>
+        <p:spPr>
+          <a:xfrm>
+            <a:off x="731520" y="1097280"/>
+            <a:ext cx="10728655" cy="13716"/>
+          </a:xfrm>
+          <a:prstGeom prst="rect">
+            <a:avLst/>
+          </a:prstGeom>
+          <a:solidFill>
+            <a:srgbClr val="000000"/>
+          </a:solidFill>
+          <a:ln>
+            <a:solidFill>
+              <a:srgbClr val="000000"/>
+            </a:solidFill>
+          </a:ln>
+        </p:spPr>
+        <p:style>
+          <a:lnRef idx="1">
+            <a:schemeClr val="accent1"/>
+          </a:lnRef>
+          <a:fillRef idx="3">
+            <a:schemeClr val="accent1"/>
+          </a:fillRef>
+          <a:effectRef idx="2">
+            <a:schemeClr val="accent1"/>
+          </a:effectRef>
+          <a:fontRef idx="minor">
+            <a:schemeClr val="lt1"/>
+          </a:fontRef>
+        </p:style>
+        <p:txBody>
+          <a:bodyPr rtlCol="0" anchor="ctr"/>
+          <a:lstStyle/>
+          <a:p>
+            <a:pPr algn="ctr"/>
+          </a:p>
+        </p:txBody>
+      </p:sp>
+      <p:sp>
+        <p:nvSpPr>
+          <p:cNvPr id="4" name="Rectangle 3"/>
+          <p:cNvSpPr/>
+          <p:nvPr/>
+        </p:nvSpPr>
+        <p:spPr>
+          <a:xfrm>
+            <a:off x="731520" y="6126480"/>
+            <a:ext cx="10728655" cy="9144"/>
+          </a:xfrm>
+          <a:prstGeom prst="rect">
+            <a:avLst/>
+          </a:prstGeom>
+          <a:solidFill>
+            <a:srgbClr val="DCDCDC"/>
+          </a:solidFill>
+          <a:ln>
+            <a:solidFill>
+              <a:srgbClr val="DCDCDC"/>
+            </a:solidFill>
+          </a:ln>
+        </p:spPr>
+        <p:style>
+          <a:lnRef idx="1">
+            <a:schemeClr val="accent1"/>
+          </a:lnRef>
+          <a:fillRef idx="3">
+            <a:schemeClr val="accent1"/>
+          </a:fillRef>
+          <a:effectRef idx="2">
+            <a:schemeClr val="accent1"/>
+          </a:effectRef>
+          <a:fontRef idx="minor">
+            <a:schemeClr val="lt1"/>
+          </a:fontRef>
+        </p:style>
+        <p:txBody>
+          <a:bodyPr rtlCol="0" anchor="ctr"/>
+          <a:lstStyle/>
+          <a:p>
+            <a:pPr algn="ctr"/>
+          </a:p>
+        </p:txBody>
+      </p:sp>
+      <p:sp>
+        <p:nvSpPr>
+          <p:cNvPr id="5" name="TextBox 4"/>
           <p:cNvSpPr txBox="1"/>
           <p:nvPr/>
         </p:nvSpPr>
         <p:spPr>
           <a:xfrm>
-            <a:off x="731520" y="1645920"/>
-            <a:ext cx="4114800" cy="4572000"/>
+            <a:off x="731520" y="6217920"/>
+            <a:ext cx="8229600" cy="365760"/>
           </a:xfrm>
           <a:prstGeom prst="rect">
             <a:avLst/>
@@ -5137,6 +7164,78 @@
           <a:noFill/>
         </p:spPr>
         <p:txBody>
+          <a:bodyPr wrap="square" lIns="0" tIns="0" rIns="0" bIns="0">
+            <a:spAutoFit/>
+          </a:bodyPr>
+          <a:lstStyle/>
+          <a:p>
+            <a:pPr>
+              <a:defRPr sz="900">
+                <a:solidFill>
+                  <a:srgbClr val="787878"/>
+                </a:solidFill>
+                <a:latin typeface="Calibri"/>
+              </a:defRPr>
+            </a:pPr>
+            <a:r>
+              <a:t>GESTURE CONTROLLED WIRELESS 4WD ROBOTIC CAR  |  MINI-PROJECT REPORT</a:t>
+            </a:r>
+          </a:p>
+        </p:txBody>
+      </p:sp>
+      <p:sp>
+        <p:nvSpPr>
+          <p:cNvPr id="6" name="TextBox 5"/>
+          <p:cNvSpPr txBox="1"/>
+          <p:nvPr/>
+        </p:nvSpPr>
+        <p:spPr>
+          <a:xfrm>
+            <a:off x="10058400" y="6217920"/>
+            <a:ext cx="1371600" cy="365760"/>
+          </a:xfrm>
+          <a:prstGeom prst="rect">
+            <a:avLst/>
+          </a:prstGeom>
+          <a:noFill/>
+        </p:spPr>
+        <p:txBody>
+          <a:bodyPr wrap="square" lIns="0" tIns="0" rIns="0" bIns="0">
+            <a:spAutoFit/>
+          </a:bodyPr>
+          <a:lstStyle/>
+          <a:p>
+            <a:pPr algn="r">
+              <a:defRPr sz="900" b="1">
+                <a:solidFill>
+                  <a:srgbClr val="787878"/>
+                </a:solidFill>
+                <a:latin typeface="Calibri"/>
+              </a:defRPr>
+            </a:pPr>
+            <a:r>
+              <a:t>Slide 8 of 12</a:t>
+            </a:r>
+          </a:p>
+        </p:txBody>
+      </p:sp>
+      <p:sp>
+        <p:nvSpPr>
+          <p:cNvPr id="7" name="TextBox 6"/>
+          <p:cNvSpPr txBox="1"/>
+          <p:nvPr/>
+        </p:nvSpPr>
+        <p:spPr>
+          <a:xfrm>
+            <a:off x="914400" y="1645920"/>
+            <a:ext cx="4114800" cy="4114800"/>
+          </a:xfrm>
+          <a:prstGeom prst="rect">
+            <a:avLst/>
+          </a:prstGeom>
+          <a:noFill/>
+        </p:spPr>
+        <p:txBody>
           <a:bodyPr wrap="square">
             <a:spAutoFit/>
           </a:bodyPr>
@@ -5146,15 +7245,15 @@
               <a:spcBef>
                 <a:spcPts val="1200"/>
               </a:spcBef>
-              <a:defRPr sz="1600" b="1">
+              <a:defRPr sz="1500" b="1">
                 <a:solidFill>
                   <a:srgbClr val="000000"/>
                 </a:solidFill>
-                <a:latin typeface="Arial"/>
-              </a:defRPr>
-            </a:pPr>
-            <a:r>
-              <a:t>• Holonomic Steering Mechanics:</a:t>
+                <a:latin typeface="Calibri"/>
+              </a:defRPr>
+            </a:pPr>
+            <a:r>
+              <a:t>Holonomic Mobility Control</a:t>
             </a:r>
           </a:p>
           <a:p>
@@ -5162,15 +7261,15 @@
               <a:spcAft>
                 <a:spcPts val="800"/>
               </a:spcAft>
-              <a:defRPr sz="1600">
-                <a:solidFill>
-                  <a:srgbClr val="505050"/>
-                </a:solidFill>
-                <a:latin typeface="Arial"/>
-              </a:defRPr>
-            </a:pPr>
-            <a:r>
-              <a:t>  Rollers mounted at 45-degree angles create directional force vectors that combine to allow lateral sliding, diagonal drive, and spot rotation.</a:t>
+              <a:defRPr sz="1250">
+                <a:solidFill>
+                  <a:srgbClr val="3C3C3C"/>
+                </a:solidFill>
+                <a:latin typeface="Calibri"/>
+              </a:defRPr>
+            </a:pPr>
+            <a:r>
+              <a:t>Rollers mounted at 45-degree angles on the wheel perimeter create diagonal force vectors, allowing 360-degree translation.</a:t>
             </a:r>
           </a:p>
           <a:p>
@@ -5178,15 +7277,15 @@
               <a:spcBef>
                 <a:spcPts val="1200"/>
               </a:spcBef>
-              <a:defRPr sz="1600" b="1">
+              <a:defRPr sz="1500" b="1">
                 <a:solidFill>
                   <a:srgbClr val="000000"/>
                 </a:solidFill>
-                <a:latin typeface="Arial"/>
-              </a:defRPr>
-            </a:pPr>
-            <a:r>
-              <a:t>• Movement Matrix Logic:</a:t>
+                <a:latin typeface="Calibri"/>
+              </a:defRPr>
+            </a:pPr>
+            <a:r>
+              <a:t>Movement Control Matrix</a:t>
             </a:r>
           </a:p>
           <a:p>
@@ -5194,30 +7293,30 @@
               <a:spcAft>
                 <a:spcPts val="800"/>
               </a:spcAft>
-              <a:defRPr sz="1600">
-                <a:solidFill>
-                  <a:srgbClr val="505050"/>
-                </a:solidFill>
-                <a:latin typeface="Arial"/>
-              </a:defRPr>
-            </a:pPr>
-            <a:r>
-              <a:t>  Controlling individual wheel rotation directions enables 360-degree holonomic mobility without changing vehicle orientation.</a:t>
+              <a:defRPr sz="1250">
+                <a:solidFill>
+                  <a:srgbClr val="3C3C3C"/>
+                </a:solidFill>
+                <a:latin typeface="Calibri"/>
+              </a:defRPr>
+            </a:pPr>
+            <a:r>
+              <a:t>Varying the rotational speed and direction of individual wheels enables lateral sliding, diagonal steering, and spot rotation.</a:t>
             </a:r>
           </a:p>
         </p:txBody>
       </p:sp>
       <p:graphicFrame>
         <p:nvGraphicFramePr>
-          <p:cNvPr id="4" name="Table 3"/>
+          <p:cNvPr id="8" name="Table 7"/>
           <p:cNvGraphicFramePr>
             <a:graphicFrameLocks noGrp="1"/>
           </p:cNvGraphicFramePr>
           <p:nvPr/>
         </p:nvGraphicFramePr>
         <p:xfrm>
-          <a:off x="5029200" y="1645920"/>
-          <a:ext cx="6400800" cy="4114800"/>
+          <a:off x="5303520" y="1645920"/>
+          <a:ext cx="5943600" cy="4023360"/>
         </p:xfrm>
         <a:graphic>
           <a:graphicData uri="http://schemas.openxmlformats.org/drawingml/2006/table">
@@ -5226,44 +7325,48 @@
                 <a:tableStyleId>{5C22544A-7EE6-4342-B048-85BDC9FD1C3A}</a:tableStyleId>
               </a:tblPr>
               <a:tblGrid>
-                <a:gridCol w="1280160"/>
-                <a:gridCol w="1280160"/>
-                <a:gridCol w="1280160"/>
-                <a:gridCol w="1280160"/>
-                <a:gridCol w="1280160"/>
+                <a:gridCol w="1188720"/>
+                <a:gridCol w="1188720"/>
+                <a:gridCol w="1188720"/>
+                <a:gridCol w="1188720"/>
+                <a:gridCol w="1188720"/>
               </a:tblGrid>
-              <a:tr h="685800">
+              <a:tr h="670560">
                 <a:tc>
                   <a:txBody>
                     <a:bodyPr/>
                     <a:lstStyle/>
                     <a:p>
-                      <a:pPr>
+                      <a:pPr algn="ctr">
                         <a:defRPr sz="1200" b="1">
                           <a:solidFill>
-                            <a:srgbClr val="000000"/>
+                            <a:srgbClr val="FFFFFF"/>
                           </a:solidFill>
-                          <a:latin typeface="Arial"/>
+                          <a:latin typeface="Calibri"/>
                         </a:defRPr>
                       </a:pPr>
                       <a:r>
-                        <a:t>Robot Action</a:t>
+                        <a:t>Action</a:t>
                       </a:r>
                     </a:p>
                   </a:txBody>
-                  <a:tcPr/>
+                  <a:tcPr>
+                    <a:solidFill>
+                      <a:srgbClr val="000000"/>
+                    </a:solidFill>
+                  </a:tcPr>
                 </a:tc>
                 <a:tc>
                   <a:txBody>
                     <a:bodyPr/>
                     <a:lstStyle/>
                     <a:p>
-                      <a:pPr>
+                      <a:pPr algn="ctr">
                         <a:defRPr sz="1200" b="1">
                           <a:solidFill>
-                            <a:srgbClr val="000000"/>
+                            <a:srgbClr val="FFFFFF"/>
                           </a:solidFill>
-                          <a:latin typeface="Arial"/>
+                          <a:latin typeface="Calibri"/>
                         </a:defRPr>
                       </a:pPr>
                       <a:r>
@@ -5271,19 +7374,23 @@
                       </a:r>
                     </a:p>
                   </a:txBody>
-                  <a:tcPr/>
+                  <a:tcPr>
+                    <a:solidFill>
+                      <a:srgbClr val="000000"/>
+                    </a:solidFill>
+                  </a:tcPr>
                 </a:tc>
                 <a:tc>
                   <a:txBody>
                     <a:bodyPr/>
                     <a:lstStyle/>
                     <a:p>
-                      <a:pPr>
+                      <a:pPr algn="ctr">
                         <a:defRPr sz="1200" b="1">
                           <a:solidFill>
-                            <a:srgbClr val="000000"/>
+                            <a:srgbClr val="FFFFFF"/>
                           </a:solidFill>
-                          <a:latin typeface="Arial"/>
+                          <a:latin typeface="Calibri"/>
                         </a:defRPr>
                       </a:pPr>
                       <a:r>
@@ -5291,19 +7398,23 @@
                       </a:r>
                     </a:p>
                   </a:txBody>
-                  <a:tcPr/>
+                  <a:tcPr>
+                    <a:solidFill>
+                      <a:srgbClr val="000000"/>
+                    </a:solidFill>
+                  </a:tcPr>
                 </a:tc>
                 <a:tc>
                   <a:txBody>
                     <a:bodyPr/>
                     <a:lstStyle/>
                     <a:p>
-                      <a:pPr>
+                      <a:pPr algn="ctr">
                         <a:defRPr sz="1200" b="1">
                           <a:solidFill>
-                            <a:srgbClr val="000000"/>
+                            <a:srgbClr val="FFFFFF"/>
                           </a:solidFill>
-                          <a:latin typeface="Arial"/>
+                          <a:latin typeface="Calibri"/>
                         </a:defRPr>
                       </a:pPr>
                       <a:r>
@@ -5311,19 +7422,23 @@
                       </a:r>
                     </a:p>
                   </a:txBody>
-                  <a:tcPr/>
+                  <a:tcPr>
+                    <a:solidFill>
+                      <a:srgbClr val="000000"/>
+                    </a:solidFill>
+                  </a:tcPr>
                 </a:tc>
                 <a:tc>
                   <a:txBody>
                     <a:bodyPr/>
                     <a:lstStyle/>
                     <a:p>
-                      <a:pPr>
+                      <a:pPr algn="ctr">
                         <a:defRPr sz="1200" b="1">
                           <a:solidFill>
-                            <a:srgbClr val="000000"/>
+                            <a:srgbClr val="FFFFFF"/>
                           </a:solidFill>
-                          <a:latin typeface="Arial"/>
+                          <a:latin typeface="Calibri"/>
                         </a:defRPr>
                       </a:pPr>
                       <a:r>
@@ -5331,21 +7446,25 @@
                       </a:r>
                     </a:p>
                   </a:txBody>
-                  <a:tcPr/>
+                  <a:tcPr>
+                    <a:solidFill>
+                      <a:srgbClr val="000000"/>
+                    </a:solidFill>
+                  </a:tcPr>
                 </a:tc>
               </a:tr>
-              <a:tr h="685800">
+              <a:tr h="670560">
                 <a:tc>
                   <a:txBody>
                     <a:bodyPr/>
                     <a:lstStyle/>
                     <a:p>
-                      <a:pPr>
+                      <a:pPr algn="ctr">
                         <a:defRPr sz="1100">
                           <a:solidFill>
-                            <a:srgbClr val="505050"/>
+                            <a:srgbClr val="3C3C3C"/>
                           </a:solidFill>
-                          <a:latin typeface="Arial"/>
+                          <a:latin typeface="Calibri"/>
                         </a:defRPr>
                       </a:pPr>
                       <a:r>
@@ -5353,19 +7472,23 @@
                       </a:r>
                     </a:p>
                   </a:txBody>
-                  <a:tcPr/>
+                  <a:tcPr>
+                    <a:solidFill>
+                      <a:srgbClr val="F5F5F5"/>
+                    </a:solidFill>
+                  </a:tcPr>
                 </a:tc>
                 <a:tc>
                   <a:txBody>
                     <a:bodyPr/>
                     <a:lstStyle/>
                     <a:p>
-                      <a:pPr>
+                      <a:pPr algn="ctr">
                         <a:defRPr sz="1100">
                           <a:solidFill>
-                            <a:srgbClr val="505050"/>
+                            <a:srgbClr val="3C3C3C"/>
                           </a:solidFill>
-                          <a:latin typeface="Arial"/>
+                          <a:latin typeface="Calibri"/>
                         </a:defRPr>
                       </a:pPr>
                       <a:r>
@@ -5373,19 +7496,23 @@
                       </a:r>
                     </a:p>
                   </a:txBody>
-                  <a:tcPr/>
+                  <a:tcPr>
+                    <a:solidFill>
+                      <a:srgbClr val="F5F5F5"/>
+                    </a:solidFill>
+                  </a:tcPr>
                 </a:tc>
                 <a:tc>
                   <a:txBody>
                     <a:bodyPr/>
                     <a:lstStyle/>
                     <a:p>
-                      <a:pPr>
+                      <a:pPr algn="ctr">
                         <a:defRPr sz="1100">
                           <a:solidFill>
-                            <a:srgbClr val="505050"/>
+                            <a:srgbClr val="3C3C3C"/>
                           </a:solidFill>
-                          <a:latin typeface="Arial"/>
+                          <a:latin typeface="Calibri"/>
                         </a:defRPr>
                       </a:pPr>
                       <a:r>
@@ -5393,19 +7520,23 @@
                       </a:r>
                     </a:p>
                   </a:txBody>
-                  <a:tcPr/>
+                  <a:tcPr>
+                    <a:solidFill>
+                      <a:srgbClr val="F5F5F5"/>
+                    </a:solidFill>
+                  </a:tcPr>
                 </a:tc>
                 <a:tc>
                   <a:txBody>
                     <a:bodyPr/>
                     <a:lstStyle/>
                     <a:p>
-                      <a:pPr>
+                      <a:pPr algn="ctr">
                         <a:defRPr sz="1100">
                           <a:solidFill>
-                            <a:srgbClr val="505050"/>
+                            <a:srgbClr val="3C3C3C"/>
                           </a:solidFill>
-                          <a:latin typeface="Arial"/>
+                          <a:latin typeface="Calibri"/>
                         </a:defRPr>
                       </a:pPr>
                       <a:r>
@@ -5413,19 +7544,23 @@
                       </a:r>
                     </a:p>
                   </a:txBody>
-                  <a:tcPr/>
+                  <a:tcPr>
+                    <a:solidFill>
+                      <a:srgbClr val="F5F5F5"/>
+                    </a:solidFill>
+                  </a:tcPr>
                 </a:tc>
                 <a:tc>
                   <a:txBody>
                     <a:bodyPr/>
                     <a:lstStyle/>
                     <a:p>
-                      <a:pPr>
+                      <a:pPr algn="ctr">
                         <a:defRPr sz="1100">
                           <a:solidFill>
-                            <a:srgbClr val="505050"/>
+                            <a:srgbClr val="3C3C3C"/>
                           </a:solidFill>
-                          <a:latin typeface="Arial"/>
+                          <a:latin typeface="Calibri"/>
                         </a:defRPr>
                       </a:pPr>
                       <a:r>
@@ -5433,21 +7568,25 @@
                       </a:r>
                     </a:p>
                   </a:txBody>
-                  <a:tcPr/>
+                  <a:tcPr>
+                    <a:solidFill>
+                      <a:srgbClr val="F5F5F5"/>
+                    </a:solidFill>
+                  </a:tcPr>
                 </a:tc>
               </a:tr>
-              <a:tr h="685800">
+              <a:tr h="670560">
                 <a:tc>
                   <a:txBody>
                     <a:bodyPr/>
                     <a:lstStyle/>
                     <a:p>
-                      <a:pPr>
+                      <a:pPr algn="ctr">
                         <a:defRPr sz="1100">
                           <a:solidFill>
-                            <a:srgbClr val="505050"/>
+                            <a:srgbClr val="3C3C3C"/>
                           </a:solidFill>
-                          <a:latin typeface="Arial"/>
+                          <a:latin typeface="Calibri"/>
                         </a:defRPr>
                       </a:pPr>
                       <a:r>
@@ -5455,19 +7594,23 @@
                       </a:r>
                     </a:p>
                   </a:txBody>
-                  <a:tcPr/>
+                  <a:tcPr>
+                    <a:solidFill>
+                      <a:srgbClr val="FFFFFF"/>
+                    </a:solidFill>
+                  </a:tcPr>
                 </a:tc>
                 <a:tc>
                   <a:txBody>
                     <a:bodyPr/>
                     <a:lstStyle/>
                     <a:p>
-                      <a:pPr>
+                      <a:pPr algn="ctr">
                         <a:defRPr sz="1100">
                           <a:solidFill>
-                            <a:srgbClr val="505050"/>
+                            <a:srgbClr val="3C3C3C"/>
                           </a:solidFill>
-                          <a:latin typeface="Arial"/>
+                          <a:latin typeface="Calibri"/>
                         </a:defRPr>
                       </a:pPr>
                       <a:r>
@@ -5475,19 +7618,23 @@
                       </a:r>
                     </a:p>
                   </a:txBody>
-                  <a:tcPr/>
+                  <a:tcPr>
+                    <a:solidFill>
+                      <a:srgbClr val="FFFFFF"/>
+                    </a:solidFill>
+                  </a:tcPr>
                 </a:tc>
                 <a:tc>
                   <a:txBody>
                     <a:bodyPr/>
                     <a:lstStyle/>
                     <a:p>
-                      <a:pPr>
+                      <a:pPr algn="ctr">
                         <a:defRPr sz="1100">
                           <a:solidFill>
-                            <a:srgbClr val="505050"/>
+                            <a:srgbClr val="3C3C3C"/>
                           </a:solidFill>
-                          <a:latin typeface="Arial"/>
+                          <a:latin typeface="Calibri"/>
                         </a:defRPr>
                       </a:pPr>
                       <a:r>
@@ -5495,19 +7642,23 @@
                       </a:r>
                     </a:p>
                   </a:txBody>
-                  <a:tcPr/>
+                  <a:tcPr>
+                    <a:solidFill>
+                      <a:srgbClr val="FFFFFF"/>
+                    </a:solidFill>
+                  </a:tcPr>
                 </a:tc>
                 <a:tc>
                   <a:txBody>
                     <a:bodyPr/>
                     <a:lstStyle/>
                     <a:p>
-                      <a:pPr>
+                      <a:pPr algn="ctr">
                         <a:defRPr sz="1100">
                           <a:solidFill>
-                            <a:srgbClr val="505050"/>
+                            <a:srgbClr val="3C3C3C"/>
                           </a:solidFill>
-                          <a:latin typeface="Arial"/>
+                          <a:latin typeface="Calibri"/>
                         </a:defRPr>
                       </a:pPr>
                       <a:r>
@@ -5515,19 +7666,23 @@
                       </a:r>
                     </a:p>
                   </a:txBody>
-                  <a:tcPr/>
+                  <a:tcPr>
+                    <a:solidFill>
+                      <a:srgbClr val="FFFFFF"/>
+                    </a:solidFill>
+                  </a:tcPr>
                 </a:tc>
                 <a:tc>
                   <a:txBody>
                     <a:bodyPr/>
                     <a:lstStyle/>
                     <a:p>
-                      <a:pPr>
+                      <a:pPr algn="ctr">
                         <a:defRPr sz="1100">
                           <a:solidFill>
-                            <a:srgbClr val="505050"/>
+                            <a:srgbClr val="3C3C3C"/>
                           </a:solidFill>
-                          <a:latin typeface="Arial"/>
+                          <a:latin typeface="Calibri"/>
                         </a:defRPr>
                       </a:pPr>
                       <a:r>
@@ -5535,21 +7690,25 @@
                       </a:r>
                     </a:p>
                   </a:txBody>
-                  <a:tcPr/>
+                  <a:tcPr>
+                    <a:solidFill>
+                      <a:srgbClr val="FFFFFF"/>
+                    </a:solidFill>
+                  </a:tcPr>
                 </a:tc>
               </a:tr>
-              <a:tr h="685800">
+              <a:tr h="670560">
                 <a:tc>
                   <a:txBody>
                     <a:bodyPr/>
                     <a:lstStyle/>
                     <a:p>
-                      <a:pPr>
+                      <a:pPr algn="ctr">
                         <a:defRPr sz="1100">
                           <a:solidFill>
-                            <a:srgbClr val="505050"/>
+                            <a:srgbClr val="3C3C3C"/>
                           </a:solidFill>
-                          <a:latin typeface="Arial"/>
+                          <a:latin typeface="Calibri"/>
                         </a:defRPr>
                       </a:pPr>
                       <a:r>
@@ -5557,19 +7716,23 @@
                       </a:r>
                     </a:p>
                   </a:txBody>
-                  <a:tcPr/>
+                  <a:tcPr>
+                    <a:solidFill>
+                      <a:srgbClr val="F5F5F5"/>
+                    </a:solidFill>
+                  </a:tcPr>
                 </a:tc>
                 <a:tc>
                   <a:txBody>
                     <a:bodyPr/>
                     <a:lstStyle/>
                     <a:p>
-                      <a:pPr>
+                      <a:pPr algn="ctr">
                         <a:defRPr sz="1100">
                           <a:solidFill>
-                            <a:srgbClr val="505050"/>
+                            <a:srgbClr val="3C3C3C"/>
                           </a:solidFill>
-                          <a:latin typeface="Arial"/>
+                          <a:latin typeface="Calibri"/>
                         </a:defRPr>
                       </a:pPr>
                       <a:r>
@@ -5577,19 +7740,23 @@
                       </a:r>
                     </a:p>
                   </a:txBody>
-                  <a:tcPr/>
+                  <a:tcPr>
+                    <a:solidFill>
+                      <a:srgbClr val="F5F5F5"/>
+                    </a:solidFill>
+                  </a:tcPr>
                 </a:tc>
                 <a:tc>
                   <a:txBody>
                     <a:bodyPr/>
                     <a:lstStyle/>
                     <a:p>
-                      <a:pPr>
+                      <a:pPr algn="ctr">
                         <a:defRPr sz="1100">
                           <a:solidFill>
-                            <a:srgbClr val="505050"/>
+                            <a:srgbClr val="3C3C3C"/>
                           </a:solidFill>
-                          <a:latin typeface="Arial"/>
+                          <a:latin typeface="Calibri"/>
                         </a:defRPr>
                       </a:pPr>
                       <a:r>
@@ -5597,19 +7764,23 @@
                       </a:r>
                     </a:p>
                   </a:txBody>
-                  <a:tcPr/>
+                  <a:tcPr>
+                    <a:solidFill>
+                      <a:srgbClr val="F5F5F5"/>
+                    </a:solidFill>
+                  </a:tcPr>
                 </a:tc>
                 <a:tc>
                   <a:txBody>
                     <a:bodyPr/>
                     <a:lstStyle/>
                     <a:p>
-                      <a:pPr>
+                      <a:pPr algn="ctr">
                         <a:defRPr sz="1100">
                           <a:solidFill>
-                            <a:srgbClr val="505050"/>
+                            <a:srgbClr val="3C3C3C"/>
                           </a:solidFill>
-                          <a:latin typeface="Arial"/>
+                          <a:latin typeface="Calibri"/>
                         </a:defRPr>
                       </a:pPr>
                       <a:r>
@@ -5617,19 +7788,23 @@
                       </a:r>
                     </a:p>
                   </a:txBody>
-                  <a:tcPr/>
+                  <a:tcPr>
+                    <a:solidFill>
+                      <a:srgbClr val="F5F5F5"/>
+                    </a:solidFill>
+                  </a:tcPr>
                 </a:tc>
                 <a:tc>
                   <a:txBody>
                     <a:bodyPr/>
                     <a:lstStyle/>
                     <a:p>
-                      <a:pPr>
+                      <a:pPr algn="ctr">
                         <a:defRPr sz="1100">
                           <a:solidFill>
-                            <a:srgbClr val="505050"/>
+                            <a:srgbClr val="3C3C3C"/>
                           </a:solidFill>
-                          <a:latin typeface="Arial"/>
+                          <a:latin typeface="Calibri"/>
                         </a:defRPr>
                       </a:pPr>
                       <a:r>
@@ -5637,21 +7812,25 @@
                       </a:r>
                     </a:p>
                   </a:txBody>
-                  <a:tcPr/>
+                  <a:tcPr>
+                    <a:solidFill>
+                      <a:srgbClr val="F5F5F5"/>
+                    </a:solidFill>
+                  </a:tcPr>
                 </a:tc>
               </a:tr>
-              <a:tr h="685800">
+              <a:tr h="670560">
                 <a:tc>
                   <a:txBody>
                     <a:bodyPr/>
                     <a:lstStyle/>
                     <a:p>
-                      <a:pPr>
+                      <a:pPr algn="ctr">
                         <a:defRPr sz="1100">
                           <a:solidFill>
-                            <a:srgbClr val="505050"/>
+                            <a:srgbClr val="3C3C3C"/>
                           </a:solidFill>
-                          <a:latin typeface="Arial"/>
+                          <a:latin typeface="Calibri"/>
                         </a:defRPr>
                       </a:pPr>
                       <a:r>
@@ -5659,19 +7838,23 @@
                       </a:r>
                     </a:p>
                   </a:txBody>
-                  <a:tcPr/>
+                  <a:tcPr>
+                    <a:solidFill>
+                      <a:srgbClr val="FFFFFF"/>
+                    </a:solidFill>
+                  </a:tcPr>
                 </a:tc>
                 <a:tc>
                   <a:txBody>
                     <a:bodyPr/>
                     <a:lstStyle/>
                     <a:p>
-                      <a:pPr>
+                      <a:pPr algn="ctr">
                         <a:defRPr sz="1100">
                           <a:solidFill>
-                            <a:srgbClr val="505050"/>
+                            <a:srgbClr val="3C3C3C"/>
                           </a:solidFill>
-                          <a:latin typeface="Arial"/>
+                          <a:latin typeface="Calibri"/>
                         </a:defRPr>
                       </a:pPr>
                       <a:r>
@@ -5679,19 +7862,23 @@
                       </a:r>
                     </a:p>
                   </a:txBody>
-                  <a:tcPr/>
+                  <a:tcPr>
+                    <a:solidFill>
+                      <a:srgbClr val="FFFFFF"/>
+                    </a:solidFill>
+                  </a:tcPr>
                 </a:tc>
                 <a:tc>
                   <a:txBody>
                     <a:bodyPr/>
                     <a:lstStyle/>
                     <a:p>
-                      <a:pPr>
+                      <a:pPr algn="ctr">
                         <a:defRPr sz="1100">
                           <a:solidFill>
-                            <a:srgbClr val="505050"/>
+                            <a:srgbClr val="3C3C3C"/>
                           </a:solidFill>
-                          <a:latin typeface="Arial"/>
+                          <a:latin typeface="Calibri"/>
                         </a:defRPr>
                       </a:pPr>
                       <a:r>
@@ -5699,19 +7886,23 @@
                       </a:r>
                     </a:p>
                   </a:txBody>
-                  <a:tcPr/>
+                  <a:tcPr>
+                    <a:solidFill>
+                      <a:srgbClr val="FFFFFF"/>
+                    </a:solidFill>
+                  </a:tcPr>
                 </a:tc>
                 <a:tc>
                   <a:txBody>
                     <a:bodyPr/>
                     <a:lstStyle/>
                     <a:p>
-                      <a:pPr>
+                      <a:pPr algn="ctr">
                         <a:defRPr sz="1100">
                           <a:solidFill>
-                            <a:srgbClr val="505050"/>
+                            <a:srgbClr val="3C3C3C"/>
                           </a:solidFill>
-                          <a:latin typeface="Arial"/>
+                          <a:latin typeface="Calibri"/>
                         </a:defRPr>
                       </a:pPr>
                       <a:r>
@@ -5719,19 +7910,23 @@
                       </a:r>
                     </a:p>
                   </a:txBody>
-                  <a:tcPr/>
+                  <a:tcPr>
+                    <a:solidFill>
+                      <a:srgbClr val="FFFFFF"/>
+                    </a:solidFill>
+                  </a:tcPr>
                 </a:tc>
                 <a:tc>
                   <a:txBody>
                     <a:bodyPr/>
                     <a:lstStyle/>
                     <a:p>
-                      <a:pPr>
+                      <a:pPr algn="ctr">
                         <a:defRPr sz="1100">
                           <a:solidFill>
-                            <a:srgbClr val="505050"/>
+                            <a:srgbClr val="3C3C3C"/>
                           </a:solidFill>
-                          <a:latin typeface="Arial"/>
+                          <a:latin typeface="Calibri"/>
                         </a:defRPr>
                       </a:pPr>
                       <a:r>
@@ -5739,21 +7934,25 @@
                       </a:r>
                     </a:p>
                   </a:txBody>
-                  <a:tcPr/>
+                  <a:tcPr>
+                    <a:solidFill>
+                      <a:srgbClr val="FFFFFF"/>
+                    </a:solidFill>
+                  </a:tcPr>
                 </a:tc>
               </a:tr>
-              <a:tr h="685800">
+              <a:tr h="670560">
                 <a:tc>
                   <a:txBody>
                     <a:bodyPr/>
                     <a:lstStyle/>
                     <a:p>
-                      <a:pPr>
+                      <a:pPr algn="ctr">
                         <a:defRPr sz="1100">
                           <a:solidFill>
-                            <a:srgbClr val="505050"/>
+                            <a:srgbClr val="3C3C3C"/>
                           </a:solidFill>
-                          <a:latin typeface="Arial"/>
+                          <a:latin typeface="Calibri"/>
                         </a:defRPr>
                       </a:pPr>
                       <a:r>
@@ -5761,19 +7960,23 @@
                       </a:r>
                     </a:p>
                   </a:txBody>
-                  <a:tcPr/>
+                  <a:tcPr>
+                    <a:solidFill>
+                      <a:srgbClr val="F5F5F5"/>
+                    </a:solidFill>
+                  </a:tcPr>
                 </a:tc>
                 <a:tc>
                   <a:txBody>
                     <a:bodyPr/>
                     <a:lstStyle/>
                     <a:p>
-                      <a:pPr>
+                      <a:pPr algn="ctr">
                         <a:defRPr sz="1100">
                           <a:solidFill>
-                            <a:srgbClr val="505050"/>
+                            <a:srgbClr val="3C3C3C"/>
                           </a:solidFill>
-                          <a:latin typeface="Arial"/>
+                          <a:latin typeface="Calibri"/>
                         </a:defRPr>
                       </a:pPr>
                       <a:r>
@@ -5781,19 +7984,23 @@
                       </a:r>
                     </a:p>
                   </a:txBody>
-                  <a:tcPr/>
+                  <a:tcPr>
+                    <a:solidFill>
+                      <a:srgbClr val="F5F5F5"/>
+                    </a:solidFill>
+                  </a:tcPr>
                 </a:tc>
                 <a:tc>
                   <a:txBody>
                     <a:bodyPr/>
                     <a:lstStyle/>
                     <a:p>
-                      <a:pPr>
+                      <a:pPr algn="ctr">
                         <a:defRPr sz="1100">
                           <a:solidFill>
-                            <a:srgbClr val="505050"/>
+                            <a:srgbClr val="3C3C3C"/>
                           </a:solidFill>
-                          <a:latin typeface="Arial"/>
+                          <a:latin typeface="Calibri"/>
                         </a:defRPr>
                       </a:pPr>
                       <a:r>
@@ -5801,19 +8008,23 @@
                       </a:r>
                     </a:p>
                   </a:txBody>
-                  <a:tcPr/>
+                  <a:tcPr>
+                    <a:solidFill>
+                      <a:srgbClr val="F5F5F5"/>
+                    </a:solidFill>
+                  </a:tcPr>
                 </a:tc>
                 <a:tc>
                   <a:txBody>
                     <a:bodyPr/>
                     <a:lstStyle/>
                     <a:p>
-                      <a:pPr>
+                      <a:pPr algn="ctr">
                         <a:defRPr sz="1100">
                           <a:solidFill>
-                            <a:srgbClr val="505050"/>
+                            <a:srgbClr val="3C3C3C"/>
                           </a:solidFill>
-                          <a:latin typeface="Arial"/>
+                          <a:latin typeface="Calibri"/>
                         </a:defRPr>
                       </a:pPr>
                       <a:r>
@@ -5821,19 +8032,23 @@
                       </a:r>
                     </a:p>
                   </a:txBody>
-                  <a:tcPr/>
+                  <a:tcPr>
+                    <a:solidFill>
+                      <a:srgbClr val="F5F5F5"/>
+                    </a:solidFill>
+                  </a:tcPr>
                 </a:tc>
                 <a:tc>
                   <a:txBody>
                     <a:bodyPr/>
                     <a:lstStyle/>
                     <a:p>
-                      <a:pPr>
+                      <a:pPr algn="ctr">
                         <a:defRPr sz="1100">
                           <a:solidFill>
-                            <a:srgbClr val="505050"/>
+                            <a:srgbClr val="3C3C3C"/>
                           </a:solidFill>
-                          <a:latin typeface="Arial"/>
+                          <a:latin typeface="Calibri"/>
                         </a:defRPr>
                       </a:pPr>
                       <a:r>
@@ -5841,7 +8056,11 @@
                       </a:r>
                     </a:p>
                   </a:txBody>
-                  <a:tcPr/>
+                  <a:tcPr>
+                    <a:solidFill>
+                      <a:srgbClr val="F5F5F5"/>
+                    </a:solidFill>
+                  </a:tcPr>
                 </a:tc>
               </a:tr>
             </a:tbl>
@@ -5874,7 +8093,7 @@
         </p:nvSpPr>
         <p:spPr>
           <a:xfrm>
-            <a:off x="731520" y="457200"/>
+            <a:off x="731520" y="365760"/>
             <a:ext cx="10728655" cy="731520"/>
           </a:xfrm>
           <a:prstGeom prst="rect">
@@ -5883,17 +8102,17 @@
           <a:noFill/>
         </p:spPr>
         <p:txBody>
-          <a:bodyPr wrap="square">
+          <a:bodyPr wrap="square" lIns="0" tIns="0" rIns="0" bIns="0">
             <a:spAutoFit/>
           </a:bodyPr>
           <a:lstStyle/>
           <a:p>
             <a:pPr>
-              <a:defRPr sz="3600" b="1">
+              <a:defRPr sz="3200" b="1">
                 <a:solidFill>
                   <a:srgbClr val="000000"/>
                 </a:solidFill>
-                <a:latin typeface="Arial"/>
+                <a:latin typeface="Calibri"/>
               </a:defRPr>
             </a:pPr>
             <a:r>
@@ -5904,14 +8123,104 @@
       </p:sp>
       <p:sp>
         <p:nvSpPr>
-          <p:cNvPr id="3" name="TextBox 2"/>
+          <p:cNvPr id="3" name="Rectangle 2"/>
+          <p:cNvSpPr/>
+          <p:nvPr/>
+        </p:nvSpPr>
+        <p:spPr>
+          <a:xfrm>
+            <a:off x="731520" y="1097280"/>
+            <a:ext cx="10728655" cy="13716"/>
+          </a:xfrm>
+          <a:prstGeom prst="rect">
+            <a:avLst/>
+          </a:prstGeom>
+          <a:solidFill>
+            <a:srgbClr val="000000"/>
+          </a:solidFill>
+          <a:ln>
+            <a:solidFill>
+              <a:srgbClr val="000000"/>
+            </a:solidFill>
+          </a:ln>
+        </p:spPr>
+        <p:style>
+          <a:lnRef idx="1">
+            <a:schemeClr val="accent1"/>
+          </a:lnRef>
+          <a:fillRef idx="3">
+            <a:schemeClr val="accent1"/>
+          </a:fillRef>
+          <a:effectRef idx="2">
+            <a:schemeClr val="accent1"/>
+          </a:effectRef>
+          <a:fontRef idx="minor">
+            <a:schemeClr val="lt1"/>
+          </a:fontRef>
+        </p:style>
+        <p:txBody>
+          <a:bodyPr rtlCol="0" anchor="ctr"/>
+          <a:lstStyle/>
+          <a:p>
+            <a:pPr algn="ctr"/>
+          </a:p>
+        </p:txBody>
+      </p:sp>
+      <p:sp>
+        <p:nvSpPr>
+          <p:cNvPr id="4" name="Rectangle 3"/>
+          <p:cNvSpPr/>
+          <p:nvPr/>
+        </p:nvSpPr>
+        <p:spPr>
+          <a:xfrm>
+            <a:off x="731520" y="6126480"/>
+            <a:ext cx="10728655" cy="9144"/>
+          </a:xfrm>
+          <a:prstGeom prst="rect">
+            <a:avLst/>
+          </a:prstGeom>
+          <a:solidFill>
+            <a:srgbClr val="DCDCDC"/>
+          </a:solidFill>
+          <a:ln>
+            <a:solidFill>
+              <a:srgbClr val="DCDCDC"/>
+            </a:solidFill>
+          </a:ln>
+        </p:spPr>
+        <p:style>
+          <a:lnRef idx="1">
+            <a:schemeClr val="accent1"/>
+          </a:lnRef>
+          <a:fillRef idx="3">
+            <a:schemeClr val="accent1"/>
+          </a:fillRef>
+          <a:effectRef idx="2">
+            <a:schemeClr val="accent1"/>
+          </a:effectRef>
+          <a:fontRef idx="minor">
+            <a:schemeClr val="lt1"/>
+          </a:fontRef>
+        </p:style>
+        <p:txBody>
+          <a:bodyPr rtlCol="0" anchor="ctr"/>
+          <a:lstStyle/>
+          <a:p>
+            <a:pPr algn="ctr"/>
+          </a:p>
+        </p:txBody>
+      </p:sp>
+      <p:sp>
+        <p:nvSpPr>
+          <p:cNvPr id="5" name="TextBox 4"/>
           <p:cNvSpPr txBox="1"/>
           <p:nvPr/>
         </p:nvSpPr>
         <p:spPr>
           <a:xfrm>
-            <a:off x="731520" y="1645920"/>
-            <a:ext cx="10728655" cy="4572000"/>
+            <a:off x="731520" y="6217920"/>
+            <a:ext cx="8229600" cy="365760"/>
           </a:xfrm>
           <a:prstGeom prst="rect">
             <a:avLst/>
@@ -5919,72 +8228,208 @@
           <a:noFill/>
         </p:spPr>
         <p:txBody>
+          <a:bodyPr wrap="square" lIns="0" tIns="0" rIns="0" bIns="0">
+            <a:spAutoFit/>
+          </a:bodyPr>
+          <a:lstStyle/>
+          <a:p>
+            <a:pPr>
+              <a:defRPr sz="900">
+                <a:solidFill>
+                  <a:srgbClr val="787878"/>
+                </a:solidFill>
+                <a:latin typeface="Calibri"/>
+              </a:defRPr>
+            </a:pPr>
+            <a:r>
+              <a:t>GESTURE CONTROLLED WIRELESS 4WD ROBOTIC CAR  |  MINI-PROJECT REPORT</a:t>
+            </a:r>
+          </a:p>
+        </p:txBody>
+      </p:sp>
+      <p:sp>
+        <p:nvSpPr>
+          <p:cNvPr id="6" name="TextBox 5"/>
+          <p:cNvSpPr txBox="1"/>
+          <p:nvPr/>
+        </p:nvSpPr>
+        <p:spPr>
+          <a:xfrm>
+            <a:off x="10058400" y="6217920"/>
+            <a:ext cx="1371600" cy="365760"/>
+          </a:xfrm>
+          <a:prstGeom prst="rect">
+            <a:avLst/>
+          </a:prstGeom>
+          <a:noFill/>
+        </p:spPr>
+        <p:txBody>
+          <a:bodyPr wrap="square" lIns="0" tIns="0" rIns="0" bIns="0">
+            <a:spAutoFit/>
+          </a:bodyPr>
+          <a:lstStyle/>
+          <a:p>
+            <a:pPr algn="r">
+              <a:defRPr sz="900" b="1">
+                <a:solidFill>
+                  <a:srgbClr val="787878"/>
+                </a:solidFill>
+                <a:latin typeface="Calibri"/>
+              </a:defRPr>
+            </a:pPr>
+            <a:r>
+              <a:t>Slide 9 of 12</a:t>
+            </a:r>
+          </a:p>
+        </p:txBody>
+      </p:sp>
+      <p:sp>
+        <p:nvSpPr>
+          <p:cNvPr id="7" name="TextBox 6"/>
+          <p:cNvSpPr txBox="1"/>
+          <p:nvPr/>
+        </p:nvSpPr>
+        <p:spPr>
+          <a:xfrm>
+            <a:off x="914400" y="1645920"/>
+            <a:ext cx="10332720" cy="4114800"/>
+          </a:xfrm>
+          <a:prstGeom prst="rect">
+            <a:avLst/>
+          </a:prstGeom>
+          <a:noFill/>
+        </p:spPr>
+        <p:txBody>
           <a:bodyPr wrap="square">
             <a:spAutoFit/>
           </a:bodyPr>
           <a:lstStyle/>
           <a:p>
             <a:pPr>
+              <a:spcBef>
+                <a:spcPts val="1200"/>
+              </a:spcBef>
+              <a:defRPr sz="1500" b="1">
+                <a:solidFill>
+                  <a:srgbClr val="000000"/>
+                </a:solidFill>
+                <a:latin typeface="Calibri"/>
+              </a:defRPr>
+            </a:pPr>
+            <a:r>
+              <a:t>Trigonometric Angle Calculations</a:t>
+            </a:r>
+          </a:p>
+          <a:p>
+            <a:pPr>
               <a:spcAft>
-                <a:spcPts val="2400"/>
+                <a:spcPts val="800"/>
               </a:spcAft>
-              <a:defRPr sz="1800">
-                <a:solidFill>
-                  <a:srgbClr val="505050"/>
-                </a:solidFill>
-                <a:latin typeface="Arial"/>
-              </a:defRPr>
-            </a:pPr>
-            <a:r>
-              <a:t>• Orientation Calculations: Transmitter reads raw accelerometer data from the MPU6050 over the hardware I2C bus and calculates hand Pitch and Roll angles using trigonometric functions.</a:t>
+              <a:defRPr sz="1250">
+                <a:solidFill>
+                  <a:srgbClr val="3C3C3C"/>
+                </a:solidFill>
+                <a:latin typeface="Calibri"/>
+              </a:defRPr>
+            </a:pPr>
+            <a:r>
+              <a:t>Transmitter reads MPU6050 raw accelerations over the I2C bus and calculates hand Pitch and Roll angles using trigonometric atan2 functions.</a:t>
+            </a:r>
+          </a:p>
+          <a:p>
+            <a:pPr>
+              <a:spcBef>
+                <a:spcPts val="1200"/>
+              </a:spcBef>
+              <a:defRPr sz="1500" b="1">
+                <a:solidFill>
+                  <a:srgbClr val="000000"/>
+                </a:solidFill>
+                <a:latin typeface="Calibri"/>
+              </a:defRPr>
+            </a:pPr>
+            <a:r>
+              <a:t>Vibration Complementary Filtering</a:t>
             </a:r>
           </a:p>
           <a:p>
             <a:pPr>
               <a:spcAft>
-                <a:spcPts val="2400"/>
+                <a:spcPts val="800"/>
               </a:spcAft>
-              <a:defRPr sz="1800">
-                <a:solidFill>
-                  <a:srgbClr val="505050"/>
-                </a:solidFill>
-                <a:latin typeface="Arial"/>
-              </a:defRPr>
-            </a:pPr>
-            <a:r>
-              <a:t>• Noise Filtering: Compliments raw values using complementary filters to eliminate high-frequency engine and chassis vibrations.</a:t>
+              <a:defRPr sz="1250">
+                <a:solidFill>
+                  <a:srgbClr val="3C3C3C"/>
+                </a:solidFill>
+                <a:latin typeface="Calibri"/>
+              </a:defRPr>
+            </a:pPr>
+            <a:r>
+              <a:t>Applies complementary filtering to raw angles, blending accelerometer and gyroscope vectors to remove high-frequency motor vibrations.</a:t>
+            </a:r>
+          </a:p>
+          <a:p>
+            <a:pPr>
+              <a:spcBef>
+                <a:spcPts val="1200"/>
+              </a:spcBef>
+              <a:defRPr sz="1500" b="1">
+                <a:solidFill>
+                  <a:srgbClr val="000000"/>
+                </a:solidFill>
+                <a:latin typeface="Calibri"/>
+              </a:defRPr>
+            </a:pPr>
+            <a:r>
+              <a:t>Structured Payload Broadcasting</a:t>
             </a:r>
           </a:p>
           <a:p>
             <a:pPr>
               <a:spcAft>
-                <a:spcPts val="2400"/>
+                <a:spcPts val="800"/>
               </a:spcAft>
-              <a:defRPr sz="1800">
-                <a:solidFill>
-                  <a:srgbClr val="505050"/>
-                </a:solidFill>
-                <a:latin typeface="Arial"/>
-              </a:defRPr>
-            </a:pPr>
-            <a:r>
-              <a:t>• Mapping &amp; Struct Packaging: Maps calculated tilt angles to a standard 0-254 range. Structures and broadcasts data packets to the receiver MAC.</a:t>
+              <a:defRPr sz="1250">
+                <a:solidFill>
+                  <a:srgbClr val="3C3C3C"/>
+                </a:solidFill>
+                <a:latin typeface="Calibri"/>
+              </a:defRPr>
+            </a:pPr>
+            <a:r>
+              <a:t>Maps Pitch/Roll values to 0-254 integers, packages them in a structured payload, and broadcasts via ESP-NOW to the receiver.</a:t>
+            </a:r>
+          </a:p>
+          <a:p>
+            <a:pPr>
+              <a:spcBef>
+                <a:spcPts val="1200"/>
+              </a:spcBef>
+              <a:defRPr sz="1500" b="1">
+                <a:solidFill>
+                  <a:srgbClr val="000000"/>
+                </a:solidFill>
+                <a:latin typeface="Calibri"/>
+              </a:defRPr>
+            </a:pPr>
+            <a:r>
+              <a:t>Callback Direction Decoding</a:t>
             </a:r>
           </a:p>
           <a:p>
             <a:pPr>
               <a:spcAft>
-                <a:spcPts val="2400"/>
+                <a:spcPts val="800"/>
               </a:spcAft>
-              <a:defRPr sz="1800">
-                <a:solidFill>
-                  <a:srgbClr val="505050"/>
-                </a:solidFill>
-                <a:latin typeface="Arial"/>
-              </a:defRPr>
-            </a:pPr>
-            <a:r>
-              <a:t>• Decisive Steering: Receiver callback function executes instantly. Reads structural data and steers the wheels based on threshold parameters (Neutral, Forward, Reverse, Left Slide, Right Slide, and Diagonal drift).</a:t>
+              <a:defRPr sz="1250">
+                <a:solidFill>
+                  <a:srgbClr val="3C3C3C"/>
+                </a:solidFill>
+                <a:latin typeface="Calibri"/>
+              </a:defRPr>
+            </a:pPr>
+            <a:r>
+              <a:t>Receiver decodes packets instantly inside an ESP-NOW callback, driving the H-bridges based on calibrated tilt thresholds.</a:t>
             </a:r>
           </a:p>
         </p:txBody>
